--- a/curso/pptx/S49.pptx
+++ b/curso/pptx/S49.pptx
@@ -3890,8 +3890,8 @@
         </p:nvSpPr>
         <p:spPr>
           <a:xfrm>
-            <a:off x="640000" y="420000"/>
-            <a:ext cx="10912000" cy="420000"/>
+            <a:off x="10652000" y="380000"/>
+            <a:ext cx="900000" cy="800000"/>
           </a:xfrm>
           <a:prstGeom prst="rect">
             <a:avLst/>
@@ -3906,17 +3906,17 @@
           <a:p>
             <a:pPr>
               <a:spcAft>
-                <a:spcPts val="810"/>
+                <a:spcPts val="1980"/>
               </a:spcAft>
             </a:pPr>
             <a:r>
-              <a:rPr sz="1800" b="1">
+              <a:rPr sz="4400" b="0">
                 <a:solidFill>
                   <a:srgbClr val="1F2A44"/>
                 </a:solidFill>
                 <a:latin typeface="Nunito Sans"/>
               </a:rPr>
-              <a:t>🦉 Aula de Filosofía</a:t>
+              <a:t>🙃</a:t>
             </a:r>
           </a:p>
         </p:txBody>

--- a/curso/pptx/S49.pptx
+++ b/curso/pptx/S49.pptx
@@ -471,426 +471,6 @@
     </a:lvl9pPr>
   </p:notesStyle>
 </p:notesMaster>
-</file>
-
-<file path=ppt/notesSlides/notesSlide1.xml><?xml version="1.0" encoding="utf-8"?>
-<p:notes xmlns:a="http://schemas.openxmlformats.org/drawingml/2006/main" xmlns:p="http://schemas.openxmlformats.org/presentationml/2006/main" xmlns:r="http://schemas.openxmlformats.org/officeDocument/2006/relationships">
-  <p:cSld>
-    <p:spTree>
-      <p:nvGrpSpPr>
-        <p:cNvPr id="1" name=""/>
-        <p:cNvGrpSpPr/>
-        <p:nvPr/>
-      </p:nvGrpSpPr>
-      <p:grpSpPr>
-        <a:xfrm>
-          <a:off x="0" y="0"/>
-          <a:ext cx="0" cy="0"/>
-          <a:chOff x="0" y="0"/>
-          <a:chExt cx="0" cy="0"/>
-        </a:xfrm>
-      </p:grpSpPr>
-      <p:sp>
-        <p:nvSpPr>
-          <p:cNvPr id="2" name="Slide Image Placeholder 1"/>
-          <p:cNvSpPr>
-            <a:spLocks noGrp="1"/>
-          </p:cNvSpPr>
-          <p:nvPr>
-            <p:ph type="sldImg" idx="2"/>
-          </p:nvPr>
-        </p:nvSpPr>
-        <p:spPr/>
-      </p:sp>
-      <p:sp>
-        <p:nvSpPr>
-          <p:cNvPr id="3" name="Notes Placeholder 2"/>
-          <p:cNvSpPr>
-            <a:spLocks noGrp="1"/>
-          </p:cNvSpPr>
-          <p:nvPr>
-            <p:ph type="body" idx="3" sz="quarter"/>
-          </p:nvPr>
-        </p:nvSpPr>
-        <p:spPr/>
-        <p:txBody>
-          <a:bodyPr/>
-          <a:lstStyle/>
-          <a:p>
-            <a:r>
-              <a:t>3 minutos. Sin apuntes. Es para recordar, no cuenta para nota.</a:t>
-            </a:r>
-          </a:p>
-        </p:txBody>
-      </p:sp>
-      <p:sp>
-        <p:nvSpPr>
-          <p:cNvPr id="4" name="Slide Number Placeholder 3"/>
-          <p:cNvSpPr>
-            <a:spLocks noGrp="1"/>
-          </p:cNvSpPr>
-          <p:nvPr>
-            <p:ph type="sldNum" idx="5" sz="quarter"/>
-          </p:nvPr>
-        </p:nvSpPr>
-        <p:spPr/>
-      </p:sp>
-    </p:spTree>
-  </p:cSld>
-  <p:clrMapOvr>
-    <a:masterClrMapping/>
-  </p:clrMapOvr>
-</p:notes>
-</file>
-
-<file path=ppt/notesSlides/notesSlide2.xml><?xml version="1.0" encoding="utf-8"?>
-<p:notes xmlns:a="http://schemas.openxmlformats.org/drawingml/2006/main" xmlns:p="http://schemas.openxmlformats.org/presentationml/2006/main" xmlns:r="http://schemas.openxmlformats.org/officeDocument/2006/relationships">
-  <p:cSld>
-    <p:spTree>
-      <p:nvGrpSpPr>
-        <p:cNvPr id="1" name=""/>
-        <p:cNvGrpSpPr/>
-        <p:nvPr/>
-      </p:nvGrpSpPr>
-      <p:grpSpPr>
-        <a:xfrm>
-          <a:off x="0" y="0"/>
-          <a:ext cx="0" cy="0"/>
-          <a:chOff x="0" y="0"/>
-          <a:chExt cx="0" cy="0"/>
-        </a:xfrm>
-      </p:grpSpPr>
-      <p:sp>
-        <p:nvSpPr>
-          <p:cNvPr id="2" name="Slide Image Placeholder 1"/>
-          <p:cNvSpPr>
-            <a:spLocks noGrp="1"/>
-          </p:cNvSpPr>
-          <p:nvPr>
-            <p:ph type="sldImg" idx="2"/>
-          </p:nvPr>
-        </p:nvSpPr>
-        <p:spPr/>
-      </p:sp>
-      <p:sp>
-        <p:nvSpPr>
-          <p:cNvPr id="3" name="Notes Placeholder 2"/>
-          <p:cNvSpPr>
-            <a:spLocks noGrp="1"/>
-          </p:cNvSpPr>
-          <p:nvPr>
-            <p:ph type="body" idx="3" sz="quarter"/>
-          </p:nvPr>
-        </p:nvSpPr>
-        <p:spPr/>
-        <p:txBody>
-          <a:bodyPr/>
-          <a:lstStyle/>
-          <a:p>
-            <a:r>
-              <a:t>3 minutos. Sin apuntes. Es para recordar, no cuenta para nota.</a:t>
-            </a:r>
-          </a:p>
-        </p:txBody>
-      </p:sp>
-      <p:sp>
-        <p:nvSpPr>
-          <p:cNvPr id="4" name="Slide Number Placeholder 3"/>
-          <p:cNvSpPr>
-            <a:spLocks noGrp="1"/>
-          </p:cNvSpPr>
-          <p:nvPr>
-            <p:ph type="sldNum" idx="5" sz="quarter"/>
-          </p:nvPr>
-        </p:nvSpPr>
-        <p:spPr/>
-      </p:sp>
-    </p:spTree>
-  </p:cSld>
-  <p:clrMapOvr>
-    <a:masterClrMapping/>
-  </p:clrMapOvr>
-</p:notes>
-</file>
-
-<file path=ppt/notesSlides/notesSlide3.xml><?xml version="1.0" encoding="utf-8"?>
-<p:notes xmlns:a="http://schemas.openxmlformats.org/drawingml/2006/main" xmlns:p="http://schemas.openxmlformats.org/presentationml/2006/main" xmlns:r="http://schemas.openxmlformats.org/officeDocument/2006/relationships">
-  <p:cSld>
-    <p:spTree>
-      <p:nvGrpSpPr>
-        <p:cNvPr id="1" name=""/>
-        <p:cNvGrpSpPr/>
-        <p:nvPr/>
-      </p:nvGrpSpPr>
-      <p:grpSpPr>
-        <a:xfrm>
-          <a:off x="0" y="0"/>
-          <a:ext cx="0" cy="0"/>
-          <a:chOff x="0" y="0"/>
-          <a:chExt cx="0" cy="0"/>
-        </a:xfrm>
-      </p:grpSpPr>
-      <p:sp>
-        <p:nvSpPr>
-          <p:cNvPr id="2" name="Slide Image Placeholder 1"/>
-          <p:cNvSpPr>
-            <a:spLocks noGrp="1"/>
-          </p:cNvSpPr>
-          <p:nvPr>
-            <p:ph type="sldImg" idx="2"/>
-          </p:nvPr>
-        </p:nvSpPr>
-        <p:spPr/>
-      </p:sp>
-      <p:sp>
-        <p:nvSpPr>
-          <p:cNvPr id="3" name="Notes Placeholder 2"/>
-          <p:cNvSpPr>
-            <a:spLocks noGrp="1"/>
-          </p:cNvSpPr>
-          <p:nvPr>
-            <p:ph type="body" idx="3" sz="quarter"/>
-          </p:nvPr>
-        </p:nvSpPr>
-        <p:spPr/>
-        <p:txBody>
-          <a:bodyPr/>
-          <a:lstStyle/>
-          <a:p>
-            <a:r>
-              <a:t>Nadie tiene que contestar: solo pensarlo.</a:t>
-            </a:r>
-          </a:p>
-        </p:txBody>
-      </p:sp>
-      <p:sp>
-        <p:nvSpPr>
-          <p:cNvPr id="4" name="Slide Number Placeholder 3"/>
-          <p:cNvSpPr>
-            <a:spLocks noGrp="1"/>
-          </p:cNvSpPr>
-          <p:nvPr>
-            <p:ph type="sldNum" idx="5" sz="quarter"/>
-          </p:nvPr>
-        </p:nvSpPr>
-        <p:spPr/>
-      </p:sp>
-    </p:spTree>
-  </p:cSld>
-  <p:clrMapOvr>
-    <a:masterClrMapping/>
-  </p:clrMapOvr>
-</p:notes>
-</file>
-
-<file path=ppt/notesSlides/notesSlide4.xml><?xml version="1.0" encoding="utf-8"?>
-<p:notes xmlns:a="http://schemas.openxmlformats.org/drawingml/2006/main" xmlns:p="http://schemas.openxmlformats.org/presentationml/2006/main" xmlns:r="http://schemas.openxmlformats.org/officeDocument/2006/relationships">
-  <p:cSld>
-    <p:spTree>
-      <p:nvGrpSpPr>
-        <p:cNvPr id="1" name=""/>
-        <p:cNvGrpSpPr/>
-        <p:nvPr/>
-      </p:nvGrpSpPr>
-      <p:grpSpPr>
-        <a:xfrm>
-          <a:off x="0" y="0"/>
-          <a:ext cx="0" cy="0"/>
-          <a:chOff x="0" y="0"/>
-          <a:chExt cx="0" cy="0"/>
-        </a:xfrm>
-      </p:grpSpPr>
-      <p:sp>
-        <p:nvSpPr>
-          <p:cNvPr id="2" name="Slide Image Placeholder 1"/>
-          <p:cNvSpPr>
-            <a:spLocks noGrp="1"/>
-          </p:cNvSpPr>
-          <p:nvPr>
-            <p:ph type="sldImg" idx="2"/>
-          </p:nvPr>
-        </p:nvSpPr>
-        <p:spPr/>
-      </p:sp>
-      <p:sp>
-        <p:nvSpPr>
-          <p:cNvPr id="3" name="Notes Placeholder 2"/>
-          <p:cNvSpPr>
-            <a:spLocks noGrp="1"/>
-          </p:cNvSpPr>
-          <p:nvPr>
-            <p:ph type="body" idx="3" sz="quarter"/>
-          </p:nvPr>
-        </p:nvSpPr>
-        <p:spPr/>
-        <p:txBody>
-          <a:bodyPr/>
-          <a:lstStyle/>
-          <a:p>
-            <a:r>
-              <a:t>Dejar unos segundos para que piensen la respuesta fácil antes de enseñar los pasos.</a:t>
-            </a:r>
-          </a:p>
-        </p:txBody>
-      </p:sp>
-      <p:sp>
-        <p:nvSpPr>
-          <p:cNvPr id="4" name="Slide Number Placeholder 3"/>
-          <p:cNvSpPr>
-            <a:spLocks noGrp="1"/>
-          </p:cNvSpPr>
-          <p:nvPr>
-            <p:ph type="sldNum" idx="5" sz="quarter"/>
-          </p:nvPr>
-        </p:nvSpPr>
-        <p:spPr/>
-      </p:sp>
-    </p:spTree>
-  </p:cSld>
-  <p:clrMapOvr>
-    <a:masterClrMapping/>
-  </p:clrMapOvr>
-</p:notes>
-</file>
-
-<file path=ppt/notesSlides/notesSlide5.xml><?xml version="1.0" encoding="utf-8"?>
-<p:notes xmlns:a="http://schemas.openxmlformats.org/drawingml/2006/main" xmlns:p="http://schemas.openxmlformats.org/presentationml/2006/main" xmlns:r="http://schemas.openxmlformats.org/officeDocument/2006/relationships">
-  <p:cSld>
-    <p:spTree>
-      <p:nvGrpSpPr>
-        <p:cNvPr id="1" name=""/>
-        <p:cNvGrpSpPr/>
-        <p:nvPr/>
-      </p:nvGrpSpPr>
-      <p:grpSpPr>
-        <a:xfrm>
-          <a:off x="0" y="0"/>
-          <a:ext cx="0" cy="0"/>
-          <a:chOff x="0" y="0"/>
-          <a:chExt cx="0" cy="0"/>
-        </a:xfrm>
-      </p:grpSpPr>
-      <p:sp>
-        <p:nvSpPr>
-          <p:cNvPr id="2" name="Slide Image Placeholder 1"/>
-          <p:cNvSpPr>
-            <a:spLocks noGrp="1"/>
-          </p:cNvSpPr>
-          <p:nvPr>
-            <p:ph type="sldImg" idx="2"/>
-          </p:nvPr>
-        </p:nvSpPr>
-        <p:spPr/>
-      </p:sp>
-      <p:sp>
-        <p:nvSpPr>
-          <p:cNvPr id="3" name="Notes Placeholder 2"/>
-          <p:cNvSpPr>
-            <a:spLocks noGrp="1"/>
-          </p:cNvSpPr>
-          <p:nvPr>
-            <p:ph type="body" idx="3" sz="quarter"/>
-          </p:nvPr>
-        </p:nvSpPr>
-        <p:spPr/>
-        <p:txBody>
-          <a:bodyPr/>
-          <a:lstStyle/>
-          <a:p>
-            <a:r>
-              <a:t>Dejar 2 minutos para que lo escriban. La diapositiva siguiente muestra el resumen.</a:t>
-            </a:r>
-          </a:p>
-        </p:txBody>
-      </p:sp>
-      <p:sp>
-        <p:nvSpPr>
-          <p:cNvPr id="4" name="Slide Number Placeholder 3"/>
-          <p:cNvSpPr>
-            <a:spLocks noGrp="1"/>
-          </p:cNvSpPr>
-          <p:nvPr>
-            <p:ph type="sldNum" idx="5" sz="quarter"/>
-          </p:nvPr>
-        </p:nvSpPr>
-        <p:spPr/>
-      </p:sp>
-    </p:spTree>
-  </p:cSld>
-  <p:clrMapOvr>
-    <a:masterClrMapping/>
-  </p:clrMapOvr>
-</p:notes>
-</file>
-
-<file path=ppt/notesSlides/notesSlide6.xml><?xml version="1.0" encoding="utf-8"?>
-<p:notes xmlns:a="http://schemas.openxmlformats.org/drawingml/2006/main" xmlns:p="http://schemas.openxmlformats.org/presentationml/2006/main" xmlns:r="http://schemas.openxmlformats.org/officeDocument/2006/relationships">
-  <p:cSld>
-    <p:spTree>
-      <p:nvGrpSpPr>
-        <p:cNvPr id="1" name=""/>
-        <p:cNvGrpSpPr/>
-        <p:nvPr/>
-      </p:nvGrpSpPr>
-      <p:grpSpPr>
-        <a:xfrm>
-          <a:off x="0" y="0"/>
-          <a:ext cx="0" cy="0"/>
-          <a:chOff x="0" y="0"/>
-          <a:chExt cx="0" cy="0"/>
-        </a:xfrm>
-      </p:grpSpPr>
-      <p:sp>
-        <p:nvSpPr>
-          <p:cNvPr id="2" name="Slide Image Placeholder 1"/>
-          <p:cNvSpPr>
-            <a:spLocks noGrp="1"/>
-          </p:cNvSpPr>
-          <p:nvPr>
-            <p:ph type="sldImg" idx="2"/>
-          </p:nvPr>
-        </p:nvSpPr>
-        <p:spPr/>
-      </p:sp>
-      <p:sp>
-        <p:nvSpPr>
-          <p:cNvPr id="3" name="Notes Placeholder 2"/>
-          <p:cNvSpPr>
-            <a:spLocks noGrp="1"/>
-          </p:cNvSpPr>
-          <p:nvPr>
-            <p:ph type="body" idx="3" sz="quarter"/>
-          </p:nvPr>
-        </p:nvSpPr>
-        <p:spPr/>
-        <p:txBody>
-          <a:bodyPr/>
-          <a:lstStyle/>
-          <a:p>
-            <a:r>
-              <a:t>Buscar: «diferencia entre persuadir y manipular» · «técnicas de manipulación explicadas para jóvenes»</a:t>
-            </a:r>
-          </a:p>
-        </p:txBody>
-      </p:sp>
-      <p:sp>
-        <p:nvSpPr>
-          <p:cNvPr id="4" name="Slide Number Placeholder 3"/>
-          <p:cNvSpPr>
-            <a:spLocks noGrp="1"/>
-          </p:cNvSpPr>
-          <p:nvPr>
-            <p:ph type="sldNum" idx="5" sz="quarter"/>
-          </p:nvPr>
-        </p:nvSpPr>
-        <p:spPr/>
-      </p:sp>
-    </p:spTree>
-  </p:cSld>
-  <p:clrMapOvr>
-    <a:masterClrMapping/>
-  </p:clrMapOvr>
-</p:notes>
 </file>
 
 <file path=ppt/slideLayouts/slideLayout1.xml><?xml version="1.0" encoding="utf-8"?>

--- a/curso/pptx/S49.pptx
+++ b/curso/pptx/S49.pptx
@@ -3717,7 +3717,7 @@
                 </a:solidFill>
                 <a:latin typeface="Fredoka"/>
               </a:rPr>
-              <a:t>Caso 1 · El móvil de Dylan</a:t>
+              <a:t>Caso 1 · El móvil de un chico</a:t>
             </a:r>
           </a:p>
         </p:txBody>
@@ -3799,7 +3799,7 @@
                 </a:solidFill>
                 <a:latin typeface="Nunito Sans"/>
               </a:rPr>
-              <a:t>Dylan quiere un móvil nuevo. Le dice a su padre: «El mío tiene 5 años, la batería dura 2 horas y arreglarla cuesta casi lo mismo».</a:t>
+              <a:t>Un chico quiere un móvil nuevo. Le dice a su padre: «El mío tiene 5 años, la batería dura 2 horas y arreglarla cuesta casi lo mismo».</a:t>
             </a:r>
           </a:p>
         </p:txBody>
@@ -3847,7 +3847,7 @@
                 </a:solidFill>
                 <a:latin typeface="Nunito Sans"/>
               </a:rPr>
-              <a:t>¿Qué quiere Dylan? Que su padre le compre un móvil.</a:t>
+              <a:t>¿Qué quiere el chico? Que su padre le compre un móvil.</a:t>
             </a:r>
           </a:p>
           <a:p>
@@ -3922,7 +3922,7 @@
                 </a:solidFill>
                 <a:latin typeface="Nunito Sans"/>
               </a:rPr>
-              <a:t>Conclusión: Dylan intenta convencer. Da razones y deja pensar a su padre.</a:t>
+              <a:t>Conclusión: el chico intenta convencer. Da razones y deja pensar a su padre.</a:t>
             </a:r>
           </a:p>
         </p:txBody>
@@ -4521,7 +4521,7 @@
                 </a:solidFill>
                 <a:latin typeface="Nunito Sans"/>
               </a:rPr>
-              <a:t>Una campaña contra el acoso escolar enseña a una chica comiendo sola en el patio. Da datos reales y un teléfono de ayuda.</a:t>
+              <a:t>Una campaña contra el abandono de animales enseña a un perro atado en una gasolinera. Da datos reales y un teléfono de ayuda.</a:t>
             </a:r>
           </a:p>
         </p:txBody>

--- a/curso/pptx/S49.pptx
+++ b/curso/pptx/S49.pptx
@@ -20,8 +20,6 @@
     <p:sldId id="268" r:id="rId20"/>
     <p:sldId id="269" r:id="rId21"/>
     <p:sldId id="270" r:id="rId22"/>
-    <p:sldId id="271" r:id="rId23"/>
-    <p:sldId id="272" r:id="rId24"/>
   </p:sldIdLst>
   <p:sldSz cx="12192000" cy="6858000" type="screen4x3"/>
   <p:notesSz cx="6858000" cy="9144000"/>
@@ -3535,7 +3533,7 @@
                 </a:solidFill>
                 <a:latin typeface="Nunito Sans"/>
               </a:rPr>
-              <a:t>PENSAMIENTO CRÍTICO · SESIÓN 49 · UNIDAD 9 · PERSUASIÓN Y MANIPULACIÓN</a:t>
+              <a:t>PENSAMIENTO CRÍTICO · SESIÓN 49 · UNIDAD 8 · SESGOS: LA MENTE TAMBIÉN ENGAÑA</a:t>
             </a:r>
           </a:p>
         </p:txBody>
@@ -3574,7 +3572,7 @@
                 </a:solidFill>
                 <a:latin typeface="Fredoka"/>
               </a:rPr>
-              <a:t>Convencer y manipular</a:t>
+              <a:t>Repaso y examen de la unidad 8</a:t>
             </a:r>
           </a:p>
         </p:txBody>
@@ -3613,7 +3611,7 @@
                 </a:solidFill>
                 <a:latin typeface="Nunito Sans"/>
               </a:rPr>
-              <a:t>Convencer es darte razones para que decidas tú; manipular es esquivar tu juicio o esconderte información para que no pienses.</a:t>
+              <a:t>Repasamos los sesgos: atajos mentales, confirmación, efecto halo, anclaje, encuadre y exceso de confianza.</a:t>
             </a:r>
           </a:p>
         </p:txBody>
@@ -3632,7 +3630,7 @@
     <p:bg>
       <p:bgPr>
         <a:solidFill>
-          <a:srgbClr val="FBF7EF"/>
+          <a:srgbClr val="1F2A44"/>
         </a:solidFill>
         <a:effectLst/>
       </p:bgPr>
@@ -3652,8 +3650,8 @@
         </p:nvSpPr>
         <p:spPr>
           <a:xfrm>
-            <a:off x="640000" y="380000"/>
-            <a:ext cx="10912000" cy="420000"/>
+            <a:off x="640000" y="2300000"/>
+            <a:ext cx="10912000" cy="500000"/>
           </a:xfrm>
           <a:prstGeom prst="rect">
             <a:avLst/>
@@ -3668,17 +3666,17 @@
           <a:p>
             <a:pPr>
               <a:spcAft>
-                <a:spcPts val="630"/>
+                <a:spcPts val="810"/>
               </a:spcAft>
             </a:pPr>
             <a:r>
-              <a:rPr sz="1400" b="1">
-                <a:solidFill>
-                  <a:srgbClr val="E8793A"/>
-                </a:solidFill>
-                <a:latin typeface="Nunito Sans"/>
-              </a:rPr>
-              <a:t>BLOQUE 2 · CASOS RESUELTOS</a:t>
+              <a:rPr sz="1800" b="1">
+                <a:solidFill>
+                  <a:srgbClr val="F4B183"/>
+                </a:solidFill>
+                <a:latin typeface="Nunito Sans"/>
+              </a:rPr>
+              <a:t>BLOQUE 2</a:t>
             </a:r>
           </a:p>
         </p:txBody>
@@ -3691,7 +3689,7 @@
         </p:nvSpPr>
         <p:spPr>
           <a:xfrm>
-            <a:off x="640000" y="760000"/>
+            <a:off x="640000" y="2800000"/>
             <a:ext cx="10912000" cy="800000"/>
           </a:xfrm>
           <a:prstGeom prst="rect">
@@ -3707,222 +3705,17 @@
           <a:p>
             <a:pPr>
               <a:spcAft>
-                <a:spcPts val="1710"/>
+                <a:spcPts val="2160"/>
               </a:spcAft>
             </a:pPr>
             <a:r>
-              <a:rPr sz="3800" b="1">
-                <a:solidFill>
-                  <a:srgbClr val="1F2A44"/>
+              <a:rPr sz="4800" b="1">
+                <a:solidFill>
+                  <a:srgbClr val="FBF7EF"/>
                 </a:solidFill>
                 <a:latin typeface="Fredoka"/>
               </a:rPr>
-              <a:t>Caso 1 · El móvil de un chico</a:t>
-            </a:r>
-          </a:p>
-        </p:txBody>
-      </p:sp>
-      <p:sp>
-        <p:nvSpPr>
-          <p:cNvPr id="4" name="Rectangle 3"/>
-          <p:cNvSpPr/>
-          <p:nvPr/>
-        </p:nvSpPr>
-        <p:spPr>
-          <a:xfrm>
-            <a:off x="640000" y="1600000"/>
-            <a:ext cx="10912000" cy="1100000"/>
-          </a:xfrm>
-          <a:prstGeom prst="rect">
-            <a:avLst/>
-          </a:prstGeom>
-          <a:solidFill>
-            <a:srgbClr val="FFFFFF"/>
-          </a:solidFill>
-          <a:ln>
-            <a:noFill/>
-          </a:ln>
-        </p:spPr>
-        <p:style>
-          <a:lnRef idx="1">
-            <a:schemeClr val="accent1"/>
-          </a:lnRef>
-          <a:fillRef idx="3">
-            <a:schemeClr val="accent1"/>
-          </a:fillRef>
-          <a:effectRef idx="2">
-            <a:schemeClr val="accent1"/>
-          </a:effectRef>
-          <a:fontRef idx="minor">
-            <a:schemeClr val="lt1"/>
-          </a:fontRef>
-        </p:style>
-        <p:txBody>
-          <a:bodyPr rtlCol="0" anchor="ctr"/>
-          <a:lstStyle/>
-          <a:p>
-            <a:pPr algn="ctr"/>
-          </a:p>
-        </p:txBody>
-      </p:sp>
-      <p:sp>
-        <p:nvSpPr>
-          <p:cNvPr id="5" name="TextBox 4"/>
-          <p:cNvSpPr txBox="1"/>
-          <p:nvPr/>
-        </p:nvSpPr>
-        <p:spPr>
-          <a:xfrm>
-            <a:off x="840000" y="1650000"/>
-            <a:ext cx="10512000" cy="1000000"/>
-          </a:xfrm>
-          <a:prstGeom prst="rect">
-            <a:avLst/>
-          </a:prstGeom>
-          <a:noFill/>
-        </p:spPr>
-        <p:txBody>
-          <a:bodyPr wrap="square" anchor="ctr">
-            <a:spAutoFit/>
-          </a:bodyPr>
-          <a:lstStyle/>
-          <a:p>
-            <a:pPr>
-              <a:spcAft>
-                <a:spcPts val="1170"/>
-              </a:spcAft>
-            </a:pPr>
-            <a:r>
-              <a:rPr sz="2600" b="1">
-                <a:solidFill>
-                  <a:srgbClr val="1F2A44"/>
-                </a:solidFill>
-                <a:latin typeface="Nunito Sans"/>
-              </a:rPr>
-              <a:t>Un chico quiere un móvil nuevo. Le dice a su padre: «El mío tiene 5 años, la batería dura 2 horas y arreglarla cuesta casi lo mismo».</a:t>
-            </a:r>
-          </a:p>
-        </p:txBody>
-      </p:sp>
-      <p:sp>
-        <p:nvSpPr>
-          <p:cNvPr id="6" name="TextBox 5"/>
-          <p:cNvSpPr txBox="1"/>
-          <p:nvPr/>
-        </p:nvSpPr>
-        <p:spPr>
-          <a:xfrm>
-            <a:off x="640000" y="2900000"/>
-            <a:ext cx="10912000" cy="3500000"/>
-          </a:xfrm>
-          <a:prstGeom prst="rect">
-            <a:avLst/>
-          </a:prstGeom>
-          <a:noFill/>
-        </p:spPr>
-        <p:txBody>
-          <a:bodyPr wrap="square">
-            <a:spAutoFit/>
-          </a:bodyPr>
-          <a:lstStyle/>
-          <a:p>
-            <a:pPr>
-              <a:spcAft>
-                <a:spcPts val="1080"/>
-              </a:spcAft>
-            </a:pPr>
-            <a:r>
-              <a:rPr sz="2400" b="1">
-                <a:solidFill>
-                  <a:srgbClr val="E8793A"/>
-                </a:solidFill>
-                <a:latin typeface="Nunito Sans"/>
-              </a:rPr>
-              <a:t>1. </a:t>
-            </a:r>
-            <a:r>
-              <a:rPr sz="2400" b="0">
-                <a:solidFill>
-                  <a:srgbClr val="1F2A44"/>
-                </a:solidFill>
-                <a:latin typeface="Nunito Sans"/>
-              </a:rPr>
-              <a:t>¿Qué quiere el chico? Que su padre le compre un móvil.</a:t>
-            </a:r>
-          </a:p>
-          <a:p>
-            <a:pPr>
-              <a:spcAft>
-                <a:spcPts val="1080"/>
-              </a:spcAft>
-            </a:pPr>
-            <a:r>
-              <a:rPr sz="2400" b="1">
-                <a:solidFill>
-                  <a:srgbClr val="E8793A"/>
-                </a:solidFill>
-                <a:latin typeface="Nunito Sans"/>
-              </a:rPr>
-              <a:t>2. </a:t>
-            </a:r>
-            <a:r>
-              <a:rPr sz="2400" b="0">
-                <a:solidFill>
-                  <a:srgbClr val="1F2A44"/>
-                </a:solidFill>
-                <a:latin typeface="Nunito Sans"/>
-              </a:rPr>
-              <a:t>¿Cómo lo intenta? Con datos: la edad del móvil, la batería, el precio del arreglo.</a:t>
-            </a:r>
-          </a:p>
-          <a:p>
-            <a:pPr>
-              <a:spcAft>
-                <a:spcPts val="1080"/>
-              </a:spcAft>
-            </a:pPr>
-            <a:r>
-              <a:rPr sz="2400" b="1">
-                <a:solidFill>
-                  <a:srgbClr val="E8793A"/>
-                </a:solidFill>
-                <a:latin typeface="Nunito Sans"/>
-              </a:rPr>
-              <a:t>3. </a:t>
-            </a:r>
-            <a:r>
-              <a:rPr sz="2400" b="0">
-                <a:solidFill>
-                  <a:srgbClr val="1F2A44"/>
-                </a:solidFill>
-                <a:latin typeface="Nunito Sans"/>
-              </a:rPr>
-              <a:t>¿Puede su padre comprobarlo? Sí: puede mirar la batería y pedir presupuesto.</a:t>
-            </a:r>
-          </a:p>
-          <a:p>
-            <a:pPr>
-              <a:spcAft>
-                <a:spcPts val="1080"/>
-              </a:spcAft>
-            </a:pPr>
-            <a:r>
-              <a:rPr sz="2400" b="1">
-                <a:solidFill>
-                  <a:srgbClr val="E8793A"/>
-                </a:solidFill>
-                <a:latin typeface="Nunito Sans"/>
-              </a:rPr>
-              <a:t>4. </a:t>
-            </a:r>
-            <a:r>
-              <a:rPr sz="2400" b="0">
-                <a:solidFill>
-                  <a:srgbClr val="1F2A44"/>
-                </a:solidFill>
-                <a:latin typeface="Nunito Sans"/>
-              </a:rPr>
-              <a:t>Conclusión: el chico intenta convencer. Da razones y deja pensar a su padre.</a:t>
+              <a:t>Casos que lo mezclan todo</a:t>
             </a:r>
           </a:p>
         </p:txBody>
@@ -3987,7 +3780,7 @@
                 </a:solidFill>
                 <a:latin typeface="Nunito Sans"/>
               </a:rPr>
-              <a:t>BLOQUE 2 · CASOS RESUELTOS</a:t>
+              <a:t>BLOQUE 2 · CASOS QUE LO MEZCLAN TODO</a:t>
             </a:r>
           </a:p>
         </p:txBody>
@@ -4026,7 +3819,7 @@
                 </a:solidFill>
                 <a:latin typeface="Fredoka"/>
               </a:rPr>
-              <a:t>Caso 2 · Una oferta en una app</a:t>
+              <a:t>Caso · La compra del móvil</a:t>
             </a:r>
           </a:p>
         </p:txBody>
@@ -4108,7 +3901,7 @@
                 </a:solidFill>
                 <a:latin typeface="Nunito Sans"/>
               </a:rPr>
-              <a:t>«¡Última oportunidad! 9 personas están viendo esta oferta. Termina en 04:59.» No dice el precio normal ni qué pasa si esperas.</a:t>
+              <a:t>Un chico ve un móvil «antes 600 €, ahora 350 €» que anuncia su youtuber favorito. Lee solo opiniones buenas y dice: «Sé mucho de móviles; es la mejor compra». (Inventado.)</a:t>
             </a:r>
           </a:p>
         </p:txBody>
@@ -4156,7 +3949,7 @@
                 </a:solidFill>
                 <a:latin typeface="Nunito Sans"/>
               </a:rPr>
-              <a:t>¿Qué quieren? Que compre ya.</a:t>
+              <a:t>Anclaje: «antes 600 €» hace que 350 € parezca barato.</a:t>
             </a:r>
           </a:p>
           <a:p>
@@ -4181,7 +3974,7 @@
                 </a:solidFill>
                 <a:latin typeface="Nunito Sans"/>
               </a:rPr>
-              <a:t>¿Cómo lo intentan? Con prisa (el reloj) y con presión (las 9 personas).</a:t>
+              <a:t>Halo: le cae bien el youtuber, así que se fía del móvil.</a:t>
             </a:r>
           </a:p>
           <a:p>
@@ -4206,7 +3999,7 @@
                 </a:solidFill>
                 <a:latin typeface="Nunito Sans"/>
               </a:rPr>
-              <a:t>¿Me dan razones sobre el producto? No: no sé si es bueno ni si es barato.</a:t>
+              <a:t>Confirmación: solo lee opiniones buenas. Exceso de confianza: «sé mucho de móviles».</a:t>
             </a:r>
           </a:p>
           <a:p>
@@ -4231,7 +4024,7 @@
                 </a:solidFill>
                 <a:latin typeface="Nunito Sans"/>
               </a:rPr>
-              <a:t>Conclusión: es manipulación. Quieren que decida antes de pensar.</a:t>
+              <a:t>Conclusión: cuatro sesgos a la vez. Frena, compara precios y lee también las opiniones malas.</a:t>
             </a:r>
           </a:p>
         </p:txBody>
@@ -4245,110 +4038,6 @@
 </file>
 
 <file path=ppt/slides/slide12.xml><?xml version="1.0" encoding="utf-8"?>
-<p:sld xmlns:a="http://schemas.openxmlformats.org/drawingml/2006/main" xmlns:p="http://schemas.openxmlformats.org/presentationml/2006/main" xmlns:r="http://schemas.openxmlformats.org/officeDocument/2006/relationships">
-  <p:cSld>
-    <p:bg>
-      <p:bgPr>
-        <a:solidFill>
-          <a:srgbClr val="1F2A44"/>
-        </a:solidFill>
-        <a:effectLst/>
-      </p:bgPr>
-    </p:bg>
-    <p:spTree>
-      <p:nvGrpSpPr>
-        <p:cNvPr id="1" name=""/>
-        <p:cNvGrpSpPr/>
-        <p:nvPr/>
-      </p:nvGrpSpPr>
-      <p:grpSpPr/>
-      <p:sp>
-        <p:nvSpPr>
-          <p:cNvPr id="2" name="TextBox 1"/>
-          <p:cNvSpPr txBox="1"/>
-          <p:nvPr/>
-        </p:nvSpPr>
-        <p:spPr>
-          <a:xfrm>
-            <a:off x="640000" y="2300000"/>
-            <a:ext cx="10912000" cy="500000"/>
-          </a:xfrm>
-          <a:prstGeom prst="rect">
-            <a:avLst/>
-          </a:prstGeom>
-          <a:noFill/>
-        </p:spPr>
-        <p:txBody>
-          <a:bodyPr wrap="square">
-            <a:spAutoFit/>
-          </a:bodyPr>
-          <a:lstStyle/>
-          <a:p>
-            <a:pPr>
-              <a:spcAft>
-                <a:spcPts val="810"/>
-              </a:spcAft>
-            </a:pPr>
-            <a:r>
-              <a:rPr sz="1800" b="1">
-                <a:solidFill>
-                  <a:srgbClr val="F4B183"/>
-                </a:solidFill>
-                <a:latin typeface="Nunito Sans"/>
-              </a:rPr>
-              <a:t>BLOQUE 3</a:t>
-            </a:r>
-          </a:p>
-        </p:txBody>
-      </p:sp>
-      <p:sp>
-        <p:nvSpPr>
-          <p:cNvPr id="3" name="TextBox 2"/>
-          <p:cNvSpPr txBox="1"/>
-          <p:nvPr/>
-        </p:nvSpPr>
-        <p:spPr>
-          <a:xfrm>
-            <a:off x="640000" y="2800000"/>
-            <a:ext cx="10912000" cy="800000"/>
-          </a:xfrm>
-          <a:prstGeom prst="rect">
-            <a:avLst/>
-          </a:prstGeom>
-          <a:noFill/>
-        </p:spPr>
-        <p:txBody>
-          <a:bodyPr wrap="square">
-            <a:spAutoFit/>
-          </a:bodyPr>
-          <a:lstStyle/>
-          <a:p>
-            <a:pPr>
-              <a:spcAft>
-                <a:spcPts val="2160"/>
-              </a:spcAft>
-            </a:pPr>
-            <a:r>
-              <a:rPr sz="4800" b="1">
-                <a:solidFill>
-                  <a:srgbClr val="FBF7EF"/>
-                </a:solidFill>
-                <a:latin typeface="Fredoka"/>
-              </a:rPr>
-              <a:t>Caso trampa</a:t>
-            </a:r>
-          </a:p>
-        </p:txBody>
-      </p:sp>
-    </p:spTree>
-  </p:cSld>
-  <p:clrMapOvr>
-    <a:masterClrMapping/>
-  </p:clrMapOvr>
-</p:sld>
-</file>
-
-<file path=ppt/slides/slide13.xml><?xml version="1.0" encoding="utf-8"?>
 <p:sld xmlns:a="http://schemas.openxmlformats.org/drawingml/2006/main" xmlns:p="http://schemas.openxmlformats.org/presentationml/2006/main" xmlns:r="http://schemas.openxmlformats.org/officeDocument/2006/relationships">
   <p:cSld>
     <p:bg>
@@ -4400,7 +4089,7 @@
                 </a:solidFill>
                 <a:latin typeface="Nunito Sans"/>
               </a:rPr>
-              <a:t>CASO TRAMPA · BLOQUE 3 · CASO TRAMPA</a:t>
+              <a:t>CASO TRAMPA · BLOQUE 2 · CASOS QUE LO MEZCLAN TODO</a:t>
             </a:r>
           </a:p>
         </p:txBody>
@@ -4439,7 +4128,7 @@
                 </a:solidFill>
                 <a:latin typeface="Fredoka"/>
               </a:rPr>
-              <a:t>⚠ ¿Emocionar = manipular?</a:t>
+              <a:t>⚠ ¿Todo es un sesgo?</a:t>
             </a:r>
           </a:p>
         </p:txBody>
@@ -4521,7 +4210,7 @@
                 </a:solidFill>
                 <a:latin typeface="Nunito Sans"/>
               </a:rPr>
-              <a:t>Una campaña contra el abandono de animales enseña a un perro atado en una gasolinera. Da datos reales y un teléfono de ayuda.</a:t>
+              <a:t>Una chica quería unas zapatillas desde hace meses. Ve «antes 100 €, ahora 60 €». Ha mirado en tres tiendas: en todas cuestan 100 €.</a:t>
             </a:r>
           </a:p>
         </p:txBody>
@@ -4569,7 +4258,7 @@
                 </a:solidFill>
                 <a:latin typeface="Nunito Sans"/>
               </a:rPr>
-              <a:t>Te emociona mucho… ¿entonces te está manipulando?</a:t>
+              <a:t>Hay un «antes» y un «ahora»… ¿ha caído en el anclaje?</a:t>
             </a:r>
           </a:p>
           <a:p>
@@ -4594,7 +4283,7 @@
                 </a:solidFill>
                 <a:latin typeface="Nunito Sans"/>
               </a:rPr>
-              <a:t>Parece que sí: busca que sientas pena y rabia.</a:t>
+              <a:t>Parece anclaje: el «antes 100 €» hace que 60 € parezca barato.</a:t>
             </a:r>
           </a:p>
           <a:p>
@@ -4619,7 +4308,7 @@
                 </a:solidFill>
                 <a:latin typeface="Nunito Sans"/>
               </a:rPr>
-              <a:t>Pero quito la emoción y quedan razones: datos reales y una forma de pedir ayuda.</a:t>
+              <a:t>Pero ha comprobado el precio real en otras tiendas: la rebaja es de verdad.</a:t>
             </a:r>
           </a:p>
           <a:p>
@@ -4644,7 +4333,7 @@
                 </a:solidFill>
                 <a:latin typeface="Nunito Sans"/>
               </a:rPr>
-              <a:t>No me mete prisa ni me esconde nada. Un mensaje puede emocionar y ser honesto.</a:t>
+              <a:t>Y no compra por la oferta: las quería desde hace meses.</a:t>
             </a:r>
           </a:p>
           <a:p>
@@ -4669,7 +4358,150 @@
                 </a:solidFill>
                 <a:latin typeface="Nunito Sans"/>
               </a:rPr>
-              <a:t>Conclusión: el problema no es la emoción, sino usarla en lugar de razones.</a:t>
+              <a:t>Conclusión: ver una técnica no basta para decir que hay sesgo. La pregunta es: ¿he pensado con razones?</a:t>
+            </a:r>
+          </a:p>
+        </p:txBody>
+      </p:sp>
+    </p:spTree>
+  </p:cSld>
+  <p:clrMapOvr>
+    <a:masterClrMapping/>
+  </p:clrMapOvr>
+</p:sld>
+</file>
+
+<file path=ppt/slides/slide13.xml><?xml version="1.0" encoding="utf-8"?>
+<p:sld xmlns:a="http://schemas.openxmlformats.org/drawingml/2006/main" xmlns:p="http://schemas.openxmlformats.org/presentationml/2006/main" xmlns:r="http://schemas.openxmlformats.org/officeDocument/2006/relationships">
+  <p:cSld>
+    <p:bg>
+      <p:bgPr>
+        <a:solidFill>
+          <a:srgbClr val="FBF7EF"/>
+        </a:solidFill>
+        <a:effectLst/>
+      </p:bgPr>
+    </p:bg>
+    <p:spTree>
+      <p:nvGrpSpPr>
+        <p:cNvPr id="1" name=""/>
+        <p:cNvGrpSpPr/>
+        <p:nvPr/>
+      </p:nvGrpSpPr>
+      <p:grpSpPr/>
+      <p:sp>
+        <p:nvSpPr>
+          <p:cNvPr id="2" name="TextBox 1"/>
+          <p:cNvSpPr txBox="1"/>
+          <p:nvPr/>
+        </p:nvSpPr>
+        <p:spPr>
+          <a:xfrm>
+            <a:off x="640000" y="380000"/>
+            <a:ext cx="10912000" cy="420000"/>
+          </a:xfrm>
+          <a:prstGeom prst="rect">
+            <a:avLst/>
+          </a:prstGeom>
+          <a:noFill/>
+        </p:spPr>
+        <p:txBody>
+          <a:bodyPr wrap="square">
+            <a:spAutoFit/>
+          </a:bodyPr>
+          <a:lstStyle/>
+          <a:p>
+            <a:pPr>
+              <a:spcAft>
+                <a:spcPts val="630"/>
+              </a:spcAft>
+            </a:pPr>
+            <a:r>
+              <a:rPr sz="1400" b="1">
+                <a:solidFill>
+                  <a:srgbClr val="E8793A"/>
+                </a:solidFill>
+                <a:latin typeface="Nunito Sans"/>
+              </a:rPr>
+              <a:t>LO DE HOY EN TRES LÍNEAS</a:t>
+            </a:r>
+          </a:p>
+        </p:txBody>
+      </p:sp>
+      <p:sp>
+        <p:nvSpPr>
+          <p:cNvPr id="3" name="TextBox 2"/>
+          <p:cNvSpPr txBox="1"/>
+          <p:nvPr/>
+        </p:nvSpPr>
+        <p:spPr>
+          <a:xfrm>
+            <a:off x="640000" y="760000"/>
+            <a:ext cx="10912000" cy="800000"/>
+          </a:xfrm>
+          <a:prstGeom prst="rect">
+            <a:avLst/>
+          </a:prstGeom>
+          <a:noFill/>
+        </p:spPr>
+        <p:txBody>
+          <a:bodyPr wrap="square">
+            <a:spAutoFit/>
+          </a:bodyPr>
+          <a:lstStyle/>
+          <a:p>
+            <a:pPr>
+              <a:spcAft>
+                <a:spcPts val="1710"/>
+              </a:spcAft>
+            </a:pPr>
+            <a:r>
+              <a:rPr sz="3800" b="1">
+                <a:solidFill>
+                  <a:srgbClr val="1F2A44"/>
+                </a:solidFill>
+                <a:latin typeface="Fredoka"/>
+              </a:rPr>
+              <a:t>Escríbelo tú primero, sin mirar</a:t>
+            </a:r>
+          </a:p>
+        </p:txBody>
+      </p:sp>
+      <p:sp>
+        <p:nvSpPr>
+          <p:cNvPr id="4" name="TextBox 3"/>
+          <p:cNvSpPr txBox="1"/>
+          <p:nvPr/>
+        </p:nvSpPr>
+        <p:spPr>
+          <a:xfrm>
+            <a:off x="640000" y="1800000"/>
+            <a:ext cx="10912000" cy="1500000"/>
+          </a:xfrm>
+          <a:prstGeom prst="rect">
+            <a:avLst/>
+          </a:prstGeom>
+          <a:noFill/>
+        </p:spPr>
+        <p:txBody>
+          <a:bodyPr wrap="square">
+            <a:spAutoFit/>
+          </a:bodyPr>
+          <a:lstStyle/>
+          <a:p>
+            <a:pPr>
+              <a:spcAft>
+                <a:spcPts val="1170"/>
+              </a:spcAft>
+            </a:pPr>
+            <a:r>
+              <a:rPr sz="2600" b="0">
+                <a:solidFill>
+                  <a:srgbClr val="4A5568"/>
+                </a:solidFill>
+                <a:latin typeface="Nunito Sans"/>
+              </a:rPr>
+              <a:t>Dos minutos. Después lo comparamos.</a:t>
             </a:r>
           </a:p>
         </p:txBody>
@@ -4747,8 +4579,8 @@
         </p:nvSpPr>
         <p:spPr>
           <a:xfrm>
-            <a:off x="640000" y="760000"/>
-            <a:ext cx="10912000" cy="800000"/>
+            <a:off x="640000" y="1300000"/>
+            <a:ext cx="10912000" cy="4800000"/>
           </a:xfrm>
           <a:prstGeom prst="rect">
             <a:avLst/>
@@ -4763,56 +4595,76 @@
           <a:p>
             <a:pPr>
               <a:spcAft>
-                <a:spcPts val="1710"/>
+                <a:spcPts val="1350"/>
               </a:spcAft>
             </a:pPr>
             <a:r>
-              <a:rPr sz="3800" b="1">
+              <a:rPr sz="3000" b="1">
+                <a:solidFill>
+                  <a:srgbClr val="E8793A"/>
+                </a:solidFill>
+                <a:latin typeface="Nunito Sans"/>
+              </a:rPr>
+              <a:t>1. </a:t>
+            </a:r>
+            <a:r>
+              <a:rPr sz="3000" b="0">
                 <a:solidFill>
                   <a:srgbClr val="1F2A44"/>
                 </a:solidFill>
-                <a:latin typeface="Fredoka"/>
-              </a:rPr>
-              <a:t>Escríbelo tú primero, sin mirar</a:t>
-            </a:r>
-          </a:p>
-        </p:txBody>
-      </p:sp>
-      <p:sp>
-        <p:nvSpPr>
-          <p:cNvPr id="4" name="TextBox 3"/>
-          <p:cNvSpPr txBox="1"/>
-          <p:nvPr/>
-        </p:nvSpPr>
-        <p:spPr>
-          <a:xfrm>
-            <a:off x="640000" y="1800000"/>
-            <a:ext cx="10912000" cy="1500000"/>
-          </a:xfrm>
-          <a:prstGeom prst="rect">
-            <a:avLst/>
-          </a:prstGeom>
-          <a:noFill/>
-        </p:spPr>
-        <p:txBody>
-          <a:bodyPr wrap="square">
-            <a:spAutoFit/>
-          </a:bodyPr>
-          <a:lstStyle/>
+                <a:latin typeface="Nunito Sans"/>
+              </a:rPr>
+              <a:t>Los sesgos son errores que se repiten de forma predecible; suelen venir de atajos útiles.</a:t>
+            </a:r>
+          </a:p>
           <a:p>
             <a:pPr>
               <a:spcAft>
-                <a:spcPts val="1170"/>
+                <a:spcPts val="1350"/>
               </a:spcAft>
             </a:pPr>
             <a:r>
-              <a:rPr sz="2600" b="0">
-                <a:solidFill>
-                  <a:srgbClr val="4A5568"/>
-                </a:solidFill>
-                <a:latin typeface="Nunito Sans"/>
-              </a:rPr>
-              <a:t>Dos minutos. Después lo comparamos.</a:t>
+              <a:rPr sz="3000" b="1">
+                <a:solidFill>
+                  <a:srgbClr val="E8793A"/>
+                </a:solidFill>
+                <a:latin typeface="Nunito Sans"/>
+              </a:rPr>
+              <a:t>2. </a:t>
+            </a:r>
+            <a:r>
+              <a:rPr sz="3000" b="0">
+                <a:solidFill>
+                  <a:srgbClr val="1F2A44"/>
+                </a:solidFill>
+                <a:latin typeface="Nunito Sans"/>
+              </a:rPr>
+              <a:t>Confirmación, halo, anclaje, encuadre y exceso de confianza nos pasan a todos.</a:t>
+            </a:r>
+          </a:p>
+          <a:p>
+            <a:pPr>
+              <a:spcAft>
+                <a:spcPts val="1350"/>
+              </a:spcAft>
+            </a:pPr>
+            <a:r>
+              <a:rPr sz="3000" b="1">
+                <a:solidFill>
+                  <a:srgbClr val="E8793A"/>
+                </a:solidFill>
+                <a:latin typeface="Nunito Sans"/>
+              </a:rPr>
+              <a:t>3. </a:t>
+            </a:r>
+            <a:r>
+              <a:rPr sz="3000" b="0">
+                <a:solidFill>
+                  <a:srgbClr val="1F2A44"/>
+                </a:solidFill>
+                <a:latin typeface="Nunito Sans"/>
+              </a:rPr>
+              <a:t>Para frenarlos: pensar despacio, buscar lo contrario y ponerse a prueba.</a:t>
             </a:r>
           </a:p>
         </p:txBody>
@@ -4826,169 +4678,6 @@
 </file>
 
 <file path=ppt/slides/slide15.xml><?xml version="1.0" encoding="utf-8"?>
-<p:sld xmlns:a="http://schemas.openxmlformats.org/drawingml/2006/main" xmlns:p="http://schemas.openxmlformats.org/presentationml/2006/main" xmlns:r="http://schemas.openxmlformats.org/officeDocument/2006/relationships">
-  <p:cSld>
-    <p:bg>
-      <p:bgPr>
-        <a:solidFill>
-          <a:srgbClr val="FBF7EF"/>
-        </a:solidFill>
-        <a:effectLst/>
-      </p:bgPr>
-    </p:bg>
-    <p:spTree>
-      <p:nvGrpSpPr>
-        <p:cNvPr id="1" name=""/>
-        <p:cNvGrpSpPr/>
-        <p:nvPr/>
-      </p:nvGrpSpPr>
-      <p:grpSpPr/>
-      <p:sp>
-        <p:nvSpPr>
-          <p:cNvPr id="2" name="TextBox 1"/>
-          <p:cNvSpPr txBox="1"/>
-          <p:nvPr/>
-        </p:nvSpPr>
-        <p:spPr>
-          <a:xfrm>
-            <a:off x="640000" y="380000"/>
-            <a:ext cx="10912000" cy="420000"/>
-          </a:xfrm>
-          <a:prstGeom prst="rect">
-            <a:avLst/>
-          </a:prstGeom>
-          <a:noFill/>
-        </p:spPr>
-        <p:txBody>
-          <a:bodyPr wrap="square">
-            <a:spAutoFit/>
-          </a:bodyPr>
-          <a:lstStyle/>
-          <a:p>
-            <a:pPr>
-              <a:spcAft>
-                <a:spcPts val="630"/>
-              </a:spcAft>
-            </a:pPr>
-            <a:r>
-              <a:rPr sz="1400" b="1">
-                <a:solidFill>
-                  <a:srgbClr val="E8793A"/>
-                </a:solidFill>
-                <a:latin typeface="Nunito Sans"/>
-              </a:rPr>
-              <a:t>LO DE HOY EN TRES LÍNEAS</a:t>
-            </a:r>
-          </a:p>
-        </p:txBody>
-      </p:sp>
-      <p:sp>
-        <p:nvSpPr>
-          <p:cNvPr id="3" name="TextBox 2"/>
-          <p:cNvSpPr txBox="1"/>
-          <p:nvPr/>
-        </p:nvSpPr>
-        <p:spPr>
-          <a:xfrm>
-            <a:off x="640000" y="1300000"/>
-            <a:ext cx="10912000" cy="4800000"/>
-          </a:xfrm>
-          <a:prstGeom prst="rect">
-            <a:avLst/>
-          </a:prstGeom>
-          <a:noFill/>
-        </p:spPr>
-        <p:txBody>
-          <a:bodyPr wrap="square">
-            <a:spAutoFit/>
-          </a:bodyPr>
-          <a:lstStyle/>
-          <a:p>
-            <a:pPr>
-              <a:spcAft>
-                <a:spcPts val="1350"/>
-              </a:spcAft>
-            </a:pPr>
-            <a:r>
-              <a:rPr sz="3000" b="1">
-                <a:solidFill>
-                  <a:srgbClr val="E8793A"/>
-                </a:solidFill>
-                <a:latin typeface="Nunito Sans"/>
-              </a:rPr>
-              <a:t>1. </a:t>
-            </a:r>
-            <a:r>
-              <a:rPr sz="3000" b="0">
-                <a:solidFill>
-                  <a:srgbClr val="1F2A44"/>
-                </a:solidFill>
-                <a:latin typeface="Nunito Sans"/>
-              </a:rPr>
-              <a:t>Persuadir es intentar que alguien crea o haga algo.</a:t>
-            </a:r>
-          </a:p>
-          <a:p>
-            <a:pPr>
-              <a:spcAft>
-                <a:spcPts val="1350"/>
-              </a:spcAft>
-            </a:pPr>
-            <a:r>
-              <a:rPr sz="3000" b="1">
-                <a:solidFill>
-                  <a:srgbClr val="E8793A"/>
-                </a:solidFill>
-                <a:latin typeface="Nunito Sans"/>
-              </a:rPr>
-              <a:t>2. </a:t>
-            </a:r>
-            <a:r>
-              <a:rPr sz="3000" b="0">
-                <a:solidFill>
-                  <a:srgbClr val="1F2A44"/>
-                </a:solidFill>
-                <a:latin typeface="Nunito Sans"/>
-              </a:rPr>
-              <a:t>Convencer es dar razones; manipular es esquivar tu juicio o esconderte información.</a:t>
-            </a:r>
-          </a:p>
-          <a:p>
-            <a:pPr>
-              <a:spcAft>
-                <a:spcPts val="1350"/>
-              </a:spcAft>
-            </a:pPr>
-            <a:r>
-              <a:rPr sz="3000" b="1">
-                <a:solidFill>
-                  <a:srgbClr val="E8793A"/>
-                </a:solidFill>
-                <a:latin typeface="Nunito Sans"/>
-              </a:rPr>
-              <a:t>3. </a:t>
-            </a:r>
-            <a:r>
-              <a:rPr sz="3000" b="0">
-                <a:solidFill>
-                  <a:srgbClr val="1F2A44"/>
-                </a:solidFill>
-                <a:latin typeface="Nunito Sans"/>
-              </a:rPr>
-              <a:t>Emocionar no es manipular. Pregunta: ¿me meten prisa, me esconden algo, solo me emocionan?</a:t>
-            </a:r>
-          </a:p>
-        </p:txBody>
-      </p:sp>
-    </p:spTree>
-  </p:cSld>
-  <p:clrMapOvr>
-    <a:masterClrMapping/>
-  </p:clrMapOvr>
-</p:sld>
-</file>
-
-<file path=ppt/slides/slide16.xml><?xml version="1.0" encoding="utf-8"?>
 <p:sld xmlns:a="http://schemas.openxmlformats.org/drawingml/2006/main" xmlns:p="http://schemas.openxmlformats.org/presentationml/2006/main" xmlns:r="http://schemas.openxmlformats.org/officeDocument/2006/relationships">
   <p:cSld>
     <p:bg>
@@ -5040,149 +4729,6 @@
                 </a:solidFill>
                 <a:latin typeface="Nunito Sans"/>
               </a:rPr>
-              <a:t>VÍDEO</a:t>
-            </a:r>
-          </a:p>
-        </p:txBody>
-      </p:sp>
-      <p:sp>
-        <p:nvSpPr>
-          <p:cNvPr id="3" name="TextBox 2"/>
-          <p:cNvSpPr txBox="1"/>
-          <p:nvPr/>
-        </p:nvSpPr>
-        <p:spPr>
-          <a:xfrm>
-            <a:off x="640000" y="760000"/>
-            <a:ext cx="10912000" cy="800000"/>
-          </a:xfrm>
-          <a:prstGeom prst="rect">
-            <a:avLst/>
-          </a:prstGeom>
-          <a:noFill/>
-        </p:spPr>
-        <p:txBody>
-          <a:bodyPr wrap="square">
-            <a:spAutoFit/>
-          </a:bodyPr>
-          <a:lstStyle/>
-          <a:p>
-            <a:pPr>
-              <a:spcAft>
-                <a:spcPts val="1620"/>
-              </a:spcAft>
-            </a:pPr>
-            <a:r>
-              <a:rPr sz="3600" b="1">
-                <a:solidFill>
-                  <a:srgbClr val="FBF7EF"/>
-                </a:solidFill>
-                <a:latin typeface="Fredoka"/>
-              </a:rPr>
-              <a:t>La diferencia entre persuadir y manipular</a:t>
-            </a:r>
-          </a:p>
-        </p:txBody>
-      </p:sp>
-      <p:sp>
-        <p:nvSpPr>
-          <p:cNvPr id="4" name="TextBox 3"/>
-          <p:cNvSpPr txBox="1"/>
-          <p:nvPr/>
-        </p:nvSpPr>
-        <p:spPr>
-          <a:xfrm>
-            <a:off x="640000" y="2200000"/>
-            <a:ext cx="10912000" cy="2000000"/>
-          </a:xfrm>
-          <a:prstGeom prst="rect">
-            <a:avLst/>
-          </a:prstGeom>
-          <a:noFill/>
-        </p:spPr>
-        <p:txBody>
-          <a:bodyPr wrap="square">
-            <a:spAutoFit/>
-          </a:bodyPr>
-          <a:lstStyle/>
-          <a:p>
-            <a:pPr>
-              <a:spcAft>
-                <a:spcPts val="1080"/>
-              </a:spcAft>
-            </a:pPr>
-            <a:r>
-              <a:rPr sz="2400" b="0">
-                <a:solidFill>
-                  <a:srgbClr val="C9D3E6"/>
-                </a:solidFill>
-                <a:latin typeface="Nunito Sans"/>
-              </a:rPr>
-              <a:t>Que oigan con otras palabras que convencer da razones y manipular las esquiva.</a:t>
-            </a:r>
-          </a:p>
-        </p:txBody>
-      </p:sp>
-    </p:spTree>
-  </p:cSld>
-  <p:clrMapOvr>
-    <a:masterClrMapping/>
-  </p:clrMapOvr>
-</p:sld>
-</file>
-
-<file path=ppt/slides/slide17.xml><?xml version="1.0" encoding="utf-8"?>
-<p:sld xmlns:a="http://schemas.openxmlformats.org/drawingml/2006/main" xmlns:p="http://schemas.openxmlformats.org/presentationml/2006/main" xmlns:r="http://schemas.openxmlformats.org/officeDocument/2006/relationships">
-  <p:cSld>
-    <p:bg>
-      <p:bgPr>
-        <a:solidFill>
-          <a:srgbClr val="1F2A44"/>
-        </a:solidFill>
-        <a:effectLst/>
-      </p:bgPr>
-    </p:bg>
-    <p:spTree>
-      <p:nvGrpSpPr>
-        <p:cNvPr id="1" name=""/>
-        <p:cNvGrpSpPr/>
-        <p:nvPr/>
-      </p:nvGrpSpPr>
-      <p:grpSpPr/>
-      <p:sp>
-        <p:nvSpPr>
-          <p:cNvPr id="2" name="TextBox 1"/>
-          <p:cNvSpPr txBox="1"/>
-          <p:nvPr/>
-        </p:nvSpPr>
-        <p:spPr>
-          <a:xfrm>
-            <a:off x="640000" y="380000"/>
-            <a:ext cx="10912000" cy="420000"/>
-          </a:xfrm>
-          <a:prstGeom prst="rect">
-            <a:avLst/>
-          </a:prstGeom>
-          <a:noFill/>
-        </p:spPr>
-        <p:txBody>
-          <a:bodyPr wrap="square">
-            <a:spAutoFit/>
-          </a:bodyPr>
-          <a:lstStyle/>
-          <a:p>
-            <a:pPr>
-              <a:spcAft>
-                <a:spcPts val="630"/>
-              </a:spcAft>
-            </a:pPr>
-            <a:r>
-              <a:rPr sz="1400" b="1">
-                <a:solidFill>
-                  <a:srgbClr val="F4B183"/>
-                </a:solidFill>
-                <a:latin typeface="Nunito Sans"/>
-              </a:rPr>
               <a:t>AHORA, LA HOJA DEL DÍA</a:t>
             </a:r>
           </a:p>
@@ -5624,7 +5170,7 @@
                 </a:solidFill>
                 <a:latin typeface="Nunito Sans"/>
               </a:rPr>
-              <a:t>1.ª pasada: sin apuntes, con bolígrafo. 2.ª pasada: con los apuntes, en otro color. Marca «seguro» o «dudo» en cada respuesta.</a:t>
+              <a:t>Sin apuntes. Junto a cada respuesta, marca «seguro» o «dudo».</a:t>
             </a:r>
           </a:p>
         </p:txBody>
@@ -5776,7 +5322,7 @@
                 </a:solidFill>
                 <a:latin typeface="Nunito Sans"/>
               </a:rPr>
-              <a:t>Juzgar a alguien entero por un solo ______ es el efecto halo.  (sesión 48)</a:t>
+              <a:t>Sentirse ______ no es lo mismo que saber.  (sesión 48)</a:t>
             </a:r>
           </a:p>
           <a:p>
@@ -5801,7 +5347,7 @@
                 </a:solidFill>
                 <a:latin typeface="Nunito Sans"/>
               </a:rPr>
-              <a:t>Para frenar el exceso de confianza: «¿puedo ______ sin mirar?».  (sesión 48)</a:t>
+              <a:t>Ojo: el estudio de 1999 no dice que quien sabe poco se crea un ______.  (sesión 48)</a:t>
             </a:r>
           </a:p>
           <a:p>
@@ -5826,7 +5372,7 @@
                 </a:solidFill>
                 <a:latin typeface="Nunito Sans"/>
               </a:rPr>
-              <a:t>Un porcentaje dice cuántos hay de cada ______.  (sesión 37)</a:t>
+              <a:t>El clickbait exagera o ______ información para que hagas clic.  (sesión 37)</a:t>
             </a:r>
           </a:p>
         </p:txBody>
@@ -5978,7 +5524,7 @@
                 </a:solidFill>
                 <a:latin typeface="Nunito Sans"/>
               </a:rPr>
-              <a:t>Juzgar a alguien entero por un solo </a:t>
+              <a:t>Sentirse </a:t>
             </a:r>
             <a:r>
               <a:rPr sz="2600" b="1">
@@ -5987,7 +5533,7 @@
                 </a:solidFill>
                 <a:latin typeface="Nunito Sans"/>
               </a:rPr>
-              <a:t>rasgo</a:t>
+              <a:t>seguro</a:t>
             </a:r>
             <a:r>
               <a:rPr sz="2600" b="0">
@@ -5996,7 +5542,7 @@
                 </a:solidFill>
                 <a:latin typeface="Nunito Sans"/>
               </a:rPr>
-              <a:t> es el efecto halo.  (sesión 48)</a:t>
+              <a:t> no es lo mismo que saber.  (sesión 48)</a:t>
             </a:r>
           </a:p>
           <a:p>
@@ -6021,7 +5567,7 @@
                 </a:solidFill>
                 <a:latin typeface="Nunito Sans"/>
               </a:rPr>
-              <a:t>Para frenar el exceso de confianza: «¿puedo </a:t>
+              <a:t>Ojo: el estudio de 1999 no dice que quien sabe poco se crea un </a:t>
             </a:r>
             <a:r>
               <a:rPr sz="2600" b="1">
@@ -6030,7 +5576,7 @@
                 </a:solidFill>
                 <a:latin typeface="Nunito Sans"/>
               </a:rPr>
-              <a:t>explicarlo</a:t>
+              <a:t>genio</a:t>
             </a:r>
             <a:r>
               <a:rPr sz="2600" b="0">
@@ -6039,7 +5585,7 @@
                 </a:solidFill>
                 <a:latin typeface="Nunito Sans"/>
               </a:rPr>
-              <a:t> sin mirar?».  (sesión 48)</a:t>
+              <a:t>.  (sesión 48)</a:t>
             </a:r>
           </a:p>
           <a:p>
@@ -6064,7 +5610,7 @@
                 </a:solidFill>
                 <a:latin typeface="Nunito Sans"/>
               </a:rPr>
-              <a:t>Un porcentaje dice cuántos hay de cada </a:t>
+              <a:t>El clickbait exagera o </a:t>
             </a:r>
             <a:r>
               <a:rPr sz="2600" b="1">
@@ -6073,7 +5619,7 @@
                 </a:solidFill>
                 <a:latin typeface="Nunito Sans"/>
               </a:rPr>
-              <a:t>100</a:t>
+              <a:t>esconde</a:t>
             </a:r>
             <a:r>
               <a:rPr sz="2600" b="0">
@@ -6082,7 +5628,7 @@
                 </a:solidFill>
                 <a:latin typeface="Nunito Sans"/>
               </a:rPr>
-              <a:t>.  (sesión 37)</a:t>
+              <a:t> información para que hagas clic.  (sesión 37)</a:t>
             </a:r>
           </a:p>
         </p:txBody>
@@ -6229,7 +5775,7 @@
                 </a:solidFill>
                 <a:latin typeface="Nunito Sans"/>
               </a:rPr>
-              <a:t>Dos mensajes para vender la misma zapatilla. A: «Pesa 200 gramos y dura dos años». B: «Todos tus amigos ya la tienen. ¿Y tú?»</a:t>
+              <a:t>«Mi primo es el mejor mecánico: tiene cara de listo. Y sé que tengo razón, porque todo lo que leo me la da.»</a:t>
             </a:r>
           </a:p>
         </p:txBody>
@@ -6268,7 +5814,7 @@
                 </a:solidFill>
                 <a:latin typeface="Nunito Sans"/>
               </a:rPr>
-              <a:t>¿Cuál te da razones? ¿Cuál intenta que no pienses?</a:t>
+              <a:t>¿Cuántos sesgos ves en estas dos frases?</a:t>
             </a:r>
           </a:p>
         </p:txBody>
@@ -6372,7 +5918,7 @@
                 </a:solidFill>
                 <a:latin typeface="Fredoka"/>
               </a:rPr>
-              <a:t>Convencer y manipular</a:t>
+              <a:t>Repaso de la unidad 8</a:t>
             </a:r>
           </a:p>
         </p:txBody>
@@ -6437,7 +5983,7 @@
                 </a:solidFill>
                 <a:latin typeface="Nunito Sans"/>
               </a:rPr>
-              <a:t>BLOQUE 1 · CONVENCER Y MANIPULAR</a:t>
+              <a:t>BLOQUE 1 · REPASO DE LA UNIDAD 8</a:t>
             </a:r>
           </a:p>
         </p:txBody>
@@ -6476,848 +6022,7 @@
                 </a:solidFill>
                 <a:latin typeface="Fredoka"/>
               </a:rPr>
-              <a:t>Persuadir</a:t>
-            </a:r>
-          </a:p>
-        </p:txBody>
-      </p:sp>
-      <p:sp>
-        <p:nvSpPr>
-          <p:cNvPr id="4" name="Rectangle 3"/>
-          <p:cNvSpPr/>
-          <p:nvPr/>
-        </p:nvSpPr>
-        <p:spPr>
-          <a:xfrm>
-            <a:off x="640000" y="1650000"/>
-            <a:ext cx="10912000" cy="1150000"/>
-          </a:xfrm>
-          <a:prstGeom prst="rect">
-            <a:avLst/>
-          </a:prstGeom>
-          <a:solidFill>
-            <a:srgbClr val="EAF0F7"/>
-          </a:solidFill>
-          <a:ln>
-            <a:noFill/>
-          </a:ln>
-        </p:spPr>
-        <p:style>
-          <a:lnRef idx="1">
-            <a:schemeClr val="accent1"/>
-          </a:lnRef>
-          <a:fillRef idx="3">
-            <a:schemeClr val="accent1"/>
-          </a:fillRef>
-          <a:effectRef idx="2">
-            <a:schemeClr val="accent1"/>
-          </a:effectRef>
-          <a:fontRef idx="minor">
-            <a:schemeClr val="lt1"/>
-          </a:fontRef>
-        </p:style>
-        <p:txBody>
-          <a:bodyPr rtlCol="0" anchor="ctr"/>
-          <a:lstStyle/>
-          <a:p>
-            <a:pPr algn="ctr"/>
-          </a:p>
-        </p:txBody>
-      </p:sp>
-      <p:sp>
-        <p:nvSpPr>
-          <p:cNvPr id="5" name="TextBox 4"/>
-          <p:cNvSpPr txBox="1"/>
-          <p:nvPr/>
-        </p:nvSpPr>
-        <p:spPr>
-          <a:xfrm>
-            <a:off x="840000" y="1730000"/>
-            <a:ext cx="10512000" cy="1000000"/>
-          </a:xfrm>
-          <a:prstGeom prst="rect">
-            <a:avLst/>
-          </a:prstGeom>
-          <a:noFill/>
-        </p:spPr>
-        <p:txBody>
-          <a:bodyPr wrap="square" anchor="ctr">
-            <a:spAutoFit/>
-          </a:bodyPr>
-          <a:lstStyle/>
-          <a:p>
-            <a:pPr>
-              <a:spcAft>
-                <a:spcPts val="1260"/>
-              </a:spcAft>
-            </a:pPr>
-            <a:r>
-              <a:rPr sz="2800" b="1">
-                <a:solidFill>
-                  <a:srgbClr val="1F2A44"/>
-                </a:solidFill>
-                <a:latin typeface="Nunito Sans"/>
-              </a:rPr>
-              <a:t>Persuadir es intentar que alguien crea o haga algo. Se puede hacer bien o mal.</a:t>
-            </a:r>
-          </a:p>
-        </p:txBody>
-      </p:sp>
-      <p:sp>
-        <p:nvSpPr>
-          <p:cNvPr id="6" name="TextBox 5"/>
-          <p:cNvSpPr txBox="1"/>
-          <p:nvPr/>
-        </p:nvSpPr>
-        <p:spPr>
-          <a:xfrm>
-            <a:off x="640000" y="3000000"/>
-            <a:ext cx="10912000" cy="3458000"/>
-          </a:xfrm>
-          <a:prstGeom prst="rect">
-            <a:avLst/>
-          </a:prstGeom>
-          <a:noFill/>
-        </p:spPr>
-        <p:txBody>
-          <a:bodyPr wrap="square">
-            <a:spAutoFit/>
-          </a:bodyPr>
-          <a:lstStyle/>
-          <a:p>
-            <a:pPr>
-              <a:spcAft>
-                <a:spcPts val="1260"/>
-              </a:spcAft>
-            </a:pPr>
-            <a:r>
-              <a:rPr sz="2800" b="1">
-                <a:solidFill>
-                  <a:srgbClr val="E8793A"/>
-                </a:solidFill>
-                <a:latin typeface="Nunito Sans"/>
-              </a:rPr>
-              <a:t>• </a:t>
-            </a:r>
-            <a:r>
-              <a:rPr sz="2800" b="1">
-                <a:solidFill>
-                  <a:srgbClr val="1F2A44"/>
-                </a:solidFill>
-                <a:latin typeface="Nunito Sans"/>
-              </a:rPr>
-              <a:t>Convencer:</a:t>
-            </a:r>
-            <a:r>
-              <a:rPr sz="2800" b="0">
-                <a:solidFill>
-                  <a:srgbClr val="1F2A44"/>
-                </a:solidFill>
-                <a:latin typeface="Nunito Sans"/>
-              </a:rPr>
-              <a:t> dar razones que el otro puede examinar</a:t>
-            </a:r>
-          </a:p>
-          <a:p>
-            <a:pPr>
-              <a:spcAft>
-                <a:spcPts val="1260"/>
-              </a:spcAft>
-            </a:pPr>
-            <a:r>
-              <a:rPr sz="2800" b="1">
-                <a:solidFill>
-                  <a:srgbClr val="E8793A"/>
-                </a:solidFill>
-                <a:latin typeface="Nunito Sans"/>
-              </a:rPr>
-              <a:t>• </a:t>
-            </a:r>
-            <a:r>
-              <a:rPr sz="2800" b="1">
-                <a:solidFill>
-                  <a:srgbClr val="1F2A44"/>
-                </a:solidFill>
-                <a:latin typeface="Nunito Sans"/>
-              </a:rPr>
-              <a:t>Manipular:</a:t>
-            </a:r>
-            <a:r>
-              <a:rPr sz="2800" b="0">
-                <a:solidFill>
-                  <a:srgbClr val="1F2A44"/>
-                </a:solidFill>
-                <a:latin typeface="Nunito Sans"/>
-              </a:rPr>
-              <a:t> esquivar su juicio o esconderle información</a:t>
-            </a:r>
-          </a:p>
-          <a:p>
-            <a:pPr>
-              <a:spcAft>
-                <a:spcPts val="1260"/>
-              </a:spcAft>
-            </a:pPr>
-            <a:r>
-              <a:rPr sz="2800" b="1">
-                <a:solidFill>
-                  <a:srgbClr val="E8793A"/>
-                </a:solidFill>
-                <a:latin typeface="Nunito Sans"/>
-              </a:rPr>
-              <a:t>• </a:t>
-            </a:r>
-            <a:r>
-              <a:rPr sz="2800" b="0">
-                <a:solidFill>
-                  <a:srgbClr val="1F2A44"/>
-                </a:solidFill>
-                <a:latin typeface="Nunito Sans"/>
-              </a:rPr>
-              <a:t>La pregunta: ¿te dejan pensar y ver los datos?</a:t>
-            </a:r>
-          </a:p>
-          <a:p>
-            <a:pPr>
-              <a:spcAft>
-                <a:spcPts val="1260"/>
-              </a:spcAft>
-            </a:pPr>
-            <a:r>
-              <a:rPr sz="2800" b="1">
-                <a:solidFill>
-                  <a:srgbClr val="E8793A"/>
-                </a:solidFill>
-                <a:latin typeface="Nunito Sans"/>
-              </a:rPr>
-              <a:t>• </a:t>
-            </a:r>
-            <a:r>
-              <a:rPr sz="2800" b="0">
-                <a:solidFill>
-                  <a:srgbClr val="1F2A44"/>
-                </a:solidFill>
-                <a:latin typeface="Nunito Sans"/>
-              </a:rPr>
-              <a:t>Muchos mensajes mezclan las dos cosas: hay grises</a:t>
-            </a:r>
-          </a:p>
-        </p:txBody>
-      </p:sp>
-    </p:spTree>
-  </p:cSld>
-  <p:clrMapOvr>
-    <a:masterClrMapping/>
-  </p:clrMapOvr>
-</p:sld>
-</file>
-
-<file path=ppt/slides/slide7.xml><?xml version="1.0" encoding="utf-8"?>
-<p:sld xmlns:a="http://schemas.openxmlformats.org/drawingml/2006/main" xmlns:p="http://schemas.openxmlformats.org/presentationml/2006/main" xmlns:r="http://schemas.openxmlformats.org/officeDocument/2006/relationships">
-  <p:cSld>
-    <p:bg>
-      <p:bgPr>
-        <a:solidFill>
-          <a:srgbClr val="FBF7EF"/>
-        </a:solidFill>
-        <a:effectLst/>
-      </p:bgPr>
-    </p:bg>
-    <p:spTree>
-      <p:nvGrpSpPr>
-        <p:cNvPr id="1" name=""/>
-        <p:cNvGrpSpPr/>
-        <p:nvPr/>
-      </p:nvGrpSpPr>
-      <p:grpSpPr/>
-      <p:sp>
-        <p:nvSpPr>
-          <p:cNvPr id="2" name="TextBox 1"/>
-          <p:cNvSpPr txBox="1"/>
-          <p:nvPr/>
-        </p:nvSpPr>
-        <p:spPr>
-          <a:xfrm>
-            <a:off x="640000" y="380000"/>
-            <a:ext cx="10912000" cy="420000"/>
-          </a:xfrm>
-          <a:prstGeom prst="rect">
-            <a:avLst/>
-          </a:prstGeom>
-          <a:noFill/>
-        </p:spPr>
-        <p:txBody>
-          <a:bodyPr wrap="square">
-            <a:spAutoFit/>
-          </a:bodyPr>
-          <a:lstStyle/>
-          <a:p>
-            <a:pPr>
-              <a:spcAft>
-                <a:spcPts val="630"/>
-              </a:spcAft>
-            </a:pPr>
-            <a:r>
-              <a:rPr sz="1400" b="1">
-                <a:solidFill>
-                  <a:srgbClr val="E8793A"/>
-                </a:solidFill>
-                <a:latin typeface="Nunito Sans"/>
-              </a:rPr>
-              <a:t>BLOQUE 1 · CONVENCER Y MANIPULAR</a:t>
-            </a:r>
-          </a:p>
-        </p:txBody>
-      </p:sp>
-      <p:sp>
-        <p:nvSpPr>
-          <p:cNvPr id="3" name="TextBox 2"/>
-          <p:cNvSpPr txBox="1"/>
-          <p:nvPr/>
-        </p:nvSpPr>
-        <p:spPr>
-          <a:xfrm>
-            <a:off x="640000" y="760000"/>
-            <a:ext cx="10912000" cy="800000"/>
-          </a:xfrm>
-          <a:prstGeom prst="rect">
-            <a:avLst/>
-          </a:prstGeom>
-          <a:noFill/>
-        </p:spPr>
-        <p:txBody>
-          <a:bodyPr wrap="square">
-            <a:spAutoFit/>
-          </a:bodyPr>
-          <a:lstStyle/>
-          <a:p>
-            <a:pPr>
-              <a:spcAft>
-                <a:spcPts val="1710"/>
-              </a:spcAft>
-            </a:pPr>
-            <a:r>
-              <a:rPr sz="3800" b="1">
-                <a:solidFill>
-                  <a:srgbClr val="1F2A44"/>
-                </a:solidFill>
-                <a:latin typeface="Fredoka"/>
-              </a:rPr>
-              <a:t>Manipular y convencer</a:t>
-            </a:r>
-          </a:p>
-        </p:txBody>
-      </p:sp>
-      <p:sp>
-        <p:nvSpPr>
-          <p:cNvPr id="4" name="Rectangle 3"/>
-          <p:cNvSpPr/>
-          <p:nvPr/>
-        </p:nvSpPr>
-        <p:spPr>
-          <a:xfrm>
-            <a:off x="640000" y="1650000"/>
-            <a:ext cx="5306000" cy="4400000"/>
-          </a:xfrm>
-          <a:prstGeom prst="rect">
-            <a:avLst/>
-          </a:prstGeom>
-          <a:solidFill>
-            <a:srgbClr val="FBE3D2"/>
-          </a:solidFill>
-          <a:ln>
-            <a:noFill/>
-          </a:ln>
-        </p:spPr>
-        <p:style>
-          <a:lnRef idx="1">
-            <a:schemeClr val="accent1"/>
-          </a:lnRef>
-          <a:fillRef idx="3">
-            <a:schemeClr val="accent1"/>
-          </a:fillRef>
-          <a:effectRef idx="2">
-            <a:schemeClr val="accent1"/>
-          </a:effectRef>
-          <a:fontRef idx="minor">
-            <a:schemeClr val="lt1"/>
-          </a:fontRef>
-        </p:style>
-        <p:txBody>
-          <a:bodyPr rtlCol="0" anchor="ctr"/>
-          <a:lstStyle/>
-          <a:p>
-            <a:pPr algn="ctr"/>
-          </a:p>
-        </p:txBody>
-      </p:sp>
-      <p:sp>
-        <p:nvSpPr>
-          <p:cNvPr id="5" name="TextBox 4"/>
-          <p:cNvSpPr txBox="1"/>
-          <p:nvPr/>
-        </p:nvSpPr>
-        <p:spPr>
-          <a:xfrm>
-            <a:off x="840000" y="1750000"/>
-            <a:ext cx="4906000" cy="600000"/>
-          </a:xfrm>
-          <a:prstGeom prst="rect">
-            <a:avLst/>
-          </a:prstGeom>
-          <a:noFill/>
-        </p:spPr>
-        <p:txBody>
-          <a:bodyPr wrap="square">
-            <a:spAutoFit/>
-          </a:bodyPr>
-          <a:lstStyle/>
-          <a:p>
-            <a:pPr>
-              <a:spcAft>
-                <a:spcPts val="1260"/>
-              </a:spcAft>
-            </a:pPr>
-            <a:r>
-              <a:rPr sz="2800" b="1">
-                <a:solidFill>
-                  <a:srgbClr val="C2531C"/>
-                </a:solidFill>
-                <a:latin typeface="Nunito Sans"/>
-              </a:rPr>
-              <a:t>Manipular</a:t>
-            </a:r>
-          </a:p>
-        </p:txBody>
-      </p:sp>
-      <p:sp>
-        <p:nvSpPr>
-          <p:cNvPr id="6" name="TextBox 5"/>
-          <p:cNvSpPr txBox="1"/>
-          <p:nvPr/>
-        </p:nvSpPr>
-        <p:spPr>
-          <a:xfrm>
-            <a:off x="840000" y="2400000"/>
-            <a:ext cx="4906000" cy="3500000"/>
-          </a:xfrm>
-          <a:prstGeom prst="rect">
-            <a:avLst/>
-          </a:prstGeom>
-          <a:noFill/>
-        </p:spPr>
-        <p:txBody>
-          <a:bodyPr wrap="square">
-            <a:spAutoFit/>
-          </a:bodyPr>
-          <a:lstStyle/>
-          <a:p>
-            <a:pPr>
-              <a:spcAft>
-                <a:spcPts val="1170"/>
-              </a:spcAft>
-            </a:pPr>
-            <a:r>
-              <a:rPr sz="2600" b="1">
-                <a:solidFill>
-                  <a:srgbClr val="E8793A"/>
-                </a:solidFill>
-                <a:latin typeface="Nunito Sans"/>
-              </a:rPr>
-              <a:t>• </a:t>
-            </a:r>
-            <a:r>
-              <a:rPr sz="2600" b="0">
-                <a:solidFill>
-                  <a:srgbClr val="1F2A44"/>
-                </a:solidFill>
-                <a:latin typeface="Nunito Sans"/>
-              </a:rPr>
-              <a:t>Esconde información</a:t>
-            </a:r>
-          </a:p>
-          <a:p>
-            <a:pPr>
-              <a:spcAft>
-                <a:spcPts val="1170"/>
-              </a:spcAft>
-            </a:pPr>
-            <a:r>
-              <a:rPr sz="2600" b="1">
-                <a:solidFill>
-                  <a:srgbClr val="E8793A"/>
-                </a:solidFill>
-                <a:latin typeface="Nunito Sans"/>
-              </a:rPr>
-              <a:t>• </a:t>
-            </a:r>
-            <a:r>
-              <a:rPr sz="2600" b="0">
-                <a:solidFill>
-                  <a:srgbClr val="1F2A44"/>
-                </a:solidFill>
-                <a:latin typeface="Nunito Sans"/>
-              </a:rPr>
-              <a:t>Mete prisa para que no pienses</a:t>
-            </a:r>
-          </a:p>
-          <a:p>
-            <a:pPr>
-              <a:spcAft>
-                <a:spcPts val="1170"/>
-              </a:spcAft>
-            </a:pPr>
-            <a:r>
-              <a:rPr sz="2600" b="1">
-                <a:solidFill>
-                  <a:srgbClr val="E8793A"/>
-                </a:solidFill>
-                <a:latin typeface="Nunito Sans"/>
-              </a:rPr>
-              <a:t>• </a:t>
-            </a:r>
-            <a:r>
-              <a:rPr sz="2600" b="0">
-                <a:solidFill>
-                  <a:srgbClr val="1F2A44"/>
-                </a:solidFill>
-                <a:latin typeface="Nunito Sans"/>
-              </a:rPr>
-              <a:t>Usa el miedo para que no pienses</a:t>
-            </a:r>
-          </a:p>
-          <a:p>
-            <a:pPr>
-              <a:spcAft>
-                <a:spcPts val="1170"/>
-              </a:spcAft>
-            </a:pPr>
-            <a:r>
-              <a:rPr sz="2600" b="1">
-                <a:solidFill>
-                  <a:srgbClr val="E8793A"/>
-                </a:solidFill>
-                <a:latin typeface="Nunito Sans"/>
-              </a:rPr>
-              <a:t>• </a:t>
-            </a:r>
-            <a:r>
-              <a:rPr sz="2600" b="0">
-                <a:solidFill>
-                  <a:srgbClr val="1F2A44"/>
-                </a:solidFill>
-                <a:latin typeface="Nunito Sans"/>
-              </a:rPr>
-              <a:t>Quiere que no preguntes</a:t>
-            </a:r>
-          </a:p>
-        </p:txBody>
-      </p:sp>
-      <p:sp>
-        <p:nvSpPr>
-          <p:cNvPr id="7" name="Rectangle 6"/>
-          <p:cNvSpPr/>
-          <p:nvPr/>
-        </p:nvSpPr>
-        <p:spPr>
-          <a:xfrm>
-            <a:off x="6246000" y="1650000"/>
-            <a:ext cx="5306000" cy="4400000"/>
-          </a:xfrm>
-          <a:prstGeom prst="rect">
-            <a:avLst/>
-          </a:prstGeom>
-          <a:solidFill>
-            <a:srgbClr val="EAF0F7"/>
-          </a:solidFill>
-          <a:ln>
-            <a:noFill/>
-          </a:ln>
-        </p:spPr>
-        <p:style>
-          <a:lnRef idx="1">
-            <a:schemeClr val="accent1"/>
-          </a:lnRef>
-          <a:fillRef idx="3">
-            <a:schemeClr val="accent1"/>
-          </a:fillRef>
-          <a:effectRef idx="2">
-            <a:schemeClr val="accent1"/>
-          </a:effectRef>
-          <a:fontRef idx="minor">
-            <a:schemeClr val="lt1"/>
-          </a:fontRef>
-        </p:style>
-        <p:txBody>
-          <a:bodyPr rtlCol="0" anchor="ctr"/>
-          <a:lstStyle/>
-          <a:p>
-            <a:pPr algn="ctr"/>
-          </a:p>
-        </p:txBody>
-      </p:sp>
-      <p:sp>
-        <p:nvSpPr>
-          <p:cNvPr id="8" name="TextBox 7"/>
-          <p:cNvSpPr txBox="1"/>
-          <p:nvPr/>
-        </p:nvSpPr>
-        <p:spPr>
-          <a:xfrm>
-            <a:off x="6446000" y="1750000"/>
-            <a:ext cx="4906000" cy="600000"/>
-          </a:xfrm>
-          <a:prstGeom prst="rect">
-            <a:avLst/>
-          </a:prstGeom>
-          <a:noFill/>
-        </p:spPr>
-        <p:txBody>
-          <a:bodyPr wrap="square">
-            <a:spAutoFit/>
-          </a:bodyPr>
-          <a:lstStyle/>
-          <a:p>
-            <a:pPr>
-              <a:spcAft>
-                <a:spcPts val="1260"/>
-              </a:spcAft>
-            </a:pPr>
-            <a:r>
-              <a:rPr sz="2800" b="1">
-                <a:solidFill>
-                  <a:srgbClr val="2F6FB5"/>
-                </a:solidFill>
-                <a:latin typeface="Nunito Sans"/>
-              </a:rPr>
-              <a:t>Convencer</a:t>
-            </a:r>
-          </a:p>
-        </p:txBody>
-      </p:sp>
-      <p:sp>
-        <p:nvSpPr>
-          <p:cNvPr id="9" name="TextBox 8"/>
-          <p:cNvSpPr txBox="1"/>
-          <p:nvPr/>
-        </p:nvSpPr>
-        <p:spPr>
-          <a:xfrm>
-            <a:off x="6446000" y="2400000"/>
-            <a:ext cx="4906000" cy="3500000"/>
-          </a:xfrm>
-          <a:prstGeom prst="rect">
-            <a:avLst/>
-          </a:prstGeom>
-          <a:noFill/>
-        </p:spPr>
-        <p:txBody>
-          <a:bodyPr wrap="square">
-            <a:spAutoFit/>
-          </a:bodyPr>
-          <a:lstStyle/>
-          <a:p>
-            <a:pPr>
-              <a:spcAft>
-                <a:spcPts val="1170"/>
-              </a:spcAft>
-            </a:pPr>
-            <a:r>
-              <a:rPr sz="2600" b="1">
-                <a:solidFill>
-                  <a:srgbClr val="E8793A"/>
-                </a:solidFill>
-                <a:latin typeface="Nunito Sans"/>
-              </a:rPr>
-              <a:t>• </a:t>
-            </a:r>
-            <a:r>
-              <a:rPr sz="2600" b="0">
-                <a:solidFill>
-                  <a:srgbClr val="1F2A44"/>
-                </a:solidFill>
-                <a:latin typeface="Nunito Sans"/>
-              </a:rPr>
-              <a:t>Enseña los datos</a:t>
-            </a:r>
-          </a:p>
-          <a:p>
-            <a:pPr>
-              <a:spcAft>
-                <a:spcPts val="1170"/>
-              </a:spcAft>
-            </a:pPr>
-            <a:r>
-              <a:rPr sz="2600" b="1">
-                <a:solidFill>
-                  <a:srgbClr val="E8793A"/>
-                </a:solidFill>
-                <a:latin typeface="Nunito Sans"/>
-              </a:rPr>
-              <a:t>• </a:t>
-            </a:r>
-            <a:r>
-              <a:rPr sz="2600" b="0">
-                <a:solidFill>
-                  <a:srgbClr val="1F2A44"/>
-                </a:solidFill>
-                <a:latin typeface="Nunito Sans"/>
-              </a:rPr>
-              <a:t>Te deja tiempo para decidir</a:t>
-            </a:r>
-          </a:p>
-          <a:p>
-            <a:pPr>
-              <a:spcAft>
-                <a:spcPts val="1170"/>
-              </a:spcAft>
-            </a:pPr>
-            <a:r>
-              <a:rPr sz="2600" b="1">
-                <a:solidFill>
-                  <a:srgbClr val="E8793A"/>
-                </a:solidFill>
-                <a:latin typeface="Nunito Sans"/>
-              </a:rPr>
-              <a:t>• </a:t>
-            </a:r>
-            <a:r>
-              <a:rPr sz="2600" b="0">
-                <a:solidFill>
-                  <a:srgbClr val="1F2A44"/>
-                </a:solidFill>
-                <a:latin typeface="Nunito Sans"/>
-              </a:rPr>
-              <a:t>Da razones que puedes comprobar</a:t>
-            </a:r>
-          </a:p>
-          <a:p>
-            <a:pPr>
-              <a:spcAft>
-                <a:spcPts val="1170"/>
-              </a:spcAft>
-            </a:pPr>
-            <a:r>
-              <a:rPr sz="2600" b="1">
-                <a:solidFill>
-                  <a:srgbClr val="E8793A"/>
-                </a:solidFill>
-                <a:latin typeface="Nunito Sans"/>
-              </a:rPr>
-              <a:t>• </a:t>
-            </a:r>
-            <a:r>
-              <a:rPr sz="2600" b="0">
-                <a:solidFill>
-                  <a:srgbClr val="1F2A44"/>
-                </a:solidFill>
-                <a:latin typeface="Nunito Sans"/>
-              </a:rPr>
-              <a:t>Acepta tus preguntas</a:t>
-            </a:r>
-          </a:p>
-        </p:txBody>
-      </p:sp>
-    </p:spTree>
-  </p:cSld>
-  <p:clrMapOvr>
-    <a:masterClrMapping/>
-  </p:clrMapOvr>
-</p:sld>
-</file>
-
-<file path=ppt/slides/slide8.xml><?xml version="1.0" encoding="utf-8"?>
-<p:sld xmlns:a="http://schemas.openxmlformats.org/drawingml/2006/main" xmlns:p="http://schemas.openxmlformats.org/presentationml/2006/main" xmlns:r="http://schemas.openxmlformats.org/officeDocument/2006/relationships">
-  <p:cSld>
-    <p:bg>
-      <p:bgPr>
-        <a:solidFill>
-          <a:srgbClr val="FBF7EF"/>
-        </a:solidFill>
-        <a:effectLst/>
-      </p:bgPr>
-    </p:bg>
-    <p:spTree>
-      <p:nvGrpSpPr>
-        <p:cNvPr id="1" name=""/>
-        <p:cNvGrpSpPr/>
-        <p:nvPr/>
-      </p:nvGrpSpPr>
-      <p:grpSpPr/>
-      <p:sp>
-        <p:nvSpPr>
-          <p:cNvPr id="2" name="TextBox 1"/>
-          <p:cNvSpPr txBox="1"/>
-          <p:nvPr/>
-        </p:nvSpPr>
-        <p:spPr>
-          <a:xfrm>
-            <a:off x="640000" y="380000"/>
-            <a:ext cx="10912000" cy="420000"/>
-          </a:xfrm>
-          <a:prstGeom prst="rect">
-            <a:avLst/>
-          </a:prstGeom>
-          <a:noFill/>
-        </p:spPr>
-        <p:txBody>
-          <a:bodyPr wrap="square">
-            <a:spAutoFit/>
-          </a:bodyPr>
-          <a:lstStyle/>
-          <a:p>
-            <a:pPr>
-              <a:spcAft>
-                <a:spcPts val="630"/>
-              </a:spcAft>
-            </a:pPr>
-            <a:r>
-              <a:rPr sz="1400" b="1">
-                <a:solidFill>
-                  <a:srgbClr val="E8793A"/>
-                </a:solidFill>
-                <a:latin typeface="Nunito Sans"/>
-              </a:rPr>
-              <a:t>BLOQUE 1 · CONVENCER Y MANIPULAR</a:t>
-            </a:r>
-          </a:p>
-        </p:txBody>
-      </p:sp>
-      <p:sp>
-        <p:nvSpPr>
-          <p:cNvPr id="3" name="TextBox 2"/>
-          <p:cNvSpPr txBox="1"/>
-          <p:nvPr/>
-        </p:nvSpPr>
-        <p:spPr>
-          <a:xfrm>
-            <a:off x="640000" y="760000"/>
-            <a:ext cx="10912000" cy="800000"/>
-          </a:xfrm>
-          <a:prstGeom prst="rect">
-            <a:avLst/>
-          </a:prstGeom>
-          <a:noFill/>
-        </p:spPr>
-        <p:txBody>
-          <a:bodyPr wrap="square">
-            <a:spAutoFit/>
-          </a:bodyPr>
-          <a:lstStyle/>
-          <a:p>
-            <a:pPr>
-              <a:spcAft>
-                <a:spcPts val="1710"/>
-              </a:spcAft>
-            </a:pPr>
-            <a:r>
-              <a:rPr sz="3800" b="1">
-                <a:solidFill>
-                  <a:srgbClr val="1F2A44"/>
-                </a:solidFill>
-                <a:latin typeface="Fredoka"/>
-              </a:rPr>
-              <a:t>Tres preguntas para detectar la manipulación</a:t>
+              <a:t>Sesgo cognitivo (sesión 44)</a:t>
             </a:r>
           </a:p>
         </p:txBody>
@@ -7357,7 +6062,7 @@
                           </a:solidFill>
                           <a:latin typeface="Fredoka"/>
                         </a:rPr>
-                        <a:t>Pregunta</a:t>
+                        <a:t>Idea</a:t>
                       </a:r>
                     </a:p>
                   </a:txBody>
@@ -7379,7 +6084,7 @@
                           </a:solidFill>
                           <a:latin typeface="Fredoka"/>
                         </a:rPr>
-                        <a:t>Si la respuesta es «sí»…</a:t>
+                        <a:t>En pocas palabras</a:t>
                       </a:r>
                     </a:p>
                   </a:txBody>
@@ -7403,25 +6108,7 @@
                           </a:solidFill>
                           <a:latin typeface="Nunito Sans"/>
                         </a:rPr>
-                        <a:t>¿Me meten </a:t>
-                      </a:r>
-                      <a:r>
-                        <a:rPr sz="2000" b="1">
-                          <a:solidFill>
-                            <a:srgbClr val="1F2A44"/>
-                          </a:solidFill>
-                          <a:latin typeface="Nunito Sans"/>
-                        </a:rPr>
-                        <a:t>prisa</a:t>
-                      </a:r>
-                      <a:r>
-                        <a:rPr sz="2000" b="0">
-                          <a:solidFill>
-                            <a:srgbClr val="1F2A44"/>
-                          </a:solidFill>
-                          <a:latin typeface="Nunito Sans"/>
-                        </a:rPr>
-                        <a:t>?</a:t>
+                        <a:t>Atajo mental</a:t>
                       </a:r>
                     </a:p>
                   </a:txBody>
@@ -7443,7 +6130,7 @@
                           </a:solidFill>
                           <a:latin typeface="Nunito Sans"/>
                         </a:rPr>
-                        <a:t>Quieren que decida antes de pensar</a:t>
+                        <a:t>Forma rápida de decidir; casi siempre acierta</a:t>
                       </a:r>
                     </a:p>
                   </a:txBody>
@@ -7467,25 +6154,7 @@
                           </a:solidFill>
                           <a:latin typeface="Nunito Sans"/>
                         </a:rPr>
-                        <a:t>¿Me </a:t>
-                      </a:r>
-                      <a:r>
-                        <a:rPr sz="2000" b="1">
-                          <a:solidFill>
-                            <a:srgbClr val="1F2A44"/>
-                          </a:solidFill>
-                          <a:latin typeface="Nunito Sans"/>
-                        </a:rPr>
-                        <a:t>esconden</a:t>
-                      </a:r>
-                      <a:r>
-                        <a:rPr sz="2000" b="0">
-                          <a:solidFill>
-                            <a:srgbClr val="1F2A44"/>
-                          </a:solidFill>
-                          <a:latin typeface="Nunito Sans"/>
-                        </a:rPr>
-                        <a:t> algo?</a:t>
+                        <a:t>Sesgo cognitivo</a:t>
                       </a:r>
                     </a:p>
                   </a:txBody>
@@ -7507,7 +6176,7 @@
                           </a:solidFill>
                           <a:latin typeface="Nunito Sans"/>
                         </a:rPr>
-                        <a:t>Quieren que no compare</a:t>
+                        <a:t>Error que se repite de forma predecible</a:t>
                       </a:r>
                     </a:p>
                   </a:txBody>
@@ -7531,25 +6200,7 @@
                           </a:solidFill>
                           <a:latin typeface="Nunito Sans"/>
                         </a:rPr>
-                        <a:t>¿Solo me </a:t>
-                      </a:r>
-                      <a:r>
-                        <a:rPr sz="2000" b="1">
-                          <a:solidFill>
-                            <a:srgbClr val="1F2A44"/>
-                          </a:solidFill>
-                          <a:latin typeface="Nunito Sans"/>
-                        </a:rPr>
-                        <a:t>emocionan</a:t>
-                      </a:r>
-                      <a:r>
-                        <a:rPr sz="2000" b="0">
-                          <a:solidFill>
-                            <a:srgbClr val="1F2A44"/>
-                          </a:solidFill>
-                          <a:latin typeface="Nunito Sans"/>
-                        </a:rPr>
-                        <a:t>?</a:t>
+                        <a:t>Pensar rápido y pensar despacio</a:t>
                       </a:r>
                     </a:p>
                   </a:txBody>
@@ -7571,7 +6222,7 @@
                           </a:solidFill>
                           <a:latin typeface="Nunito Sans"/>
                         </a:rPr>
-                        <a:t>Quieren que la emoción ocupe el lugar de las razones (sesión 16)</a:t>
+                        <a:t>Automático, sin esfuerzo / lento, con esfuerzo</a:t>
                       </a:r>
                     </a:p>
                   </a:txBody>
@@ -7594,13 +6245,13 @@
 </p:sld>
 </file>
 
-<file path=ppt/slides/slide9.xml><?xml version="1.0" encoding="utf-8"?>
+<file path=ppt/slides/slide7.xml><?xml version="1.0" encoding="utf-8"?>
 <p:sld xmlns:a="http://schemas.openxmlformats.org/drawingml/2006/main" xmlns:p="http://schemas.openxmlformats.org/presentationml/2006/main" xmlns:r="http://schemas.openxmlformats.org/officeDocument/2006/relationships">
   <p:cSld>
     <p:bg>
       <p:bgPr>
         <a:solidFill>
-          <a:srgbClr val="1F2A44"/>
+          <a:srgbClr val="FBF7EF"/>
         </a:solidFill>
         <a:effectLst/>
       </p:bgPr>
@@ -7620,8 +6271,8 @@
         </p:nvSpPr>
         <p:spPr>
           <a:xfrm>
-            <a:off x="640000" y="2300000"/>
-            <a:ext cx="10912000" cy="500000"/>
+            <a:off x="640000" y="380000"/>
+            <a:ext cx="10912000" cy="420000"/>
           </a:xfrm>
           <a:prstGeom prst="rect">
             <a:avLst/>
@@ -7636,17 +6287,17 @@
           <a:p>
             <a:pPr>
               <a:spcAft>
-                <a:spcPts val="810"/>
+                <a:spcPts val="630"/>
               </a:spcAft>
             </a:pPr>
             <a:r>
-              <a:rPr sz="1800" b="1">
-                <a:solidFill>
-                  <a:srgbClr val="F4B183"/>
-                </a:solidFill>
-                <a:latin typeface="Nunito Sans"/>
-              </a:rPr>
-              <a:t>BLOQUE 2</a:t>
+              <a:rPr sz="1400" b="1">
+                <a:solidFill>
+                  <a:srgbClr val="E8793A"/>
+                </a:solidFill>
+                <a:latin typeface="Nunito Sans"/>
+              </a:rPr>
+              <a:t>BLOQUE 1 · REPASO DE LA UNIDAD 8</a:t>
             </a:r>
           </a:p>
         </p:txBody>
@@ -7659,7 +6310,7 @@
         </p:nvSpPr>
         <p:spPr>
           <a:xfrm>
-            <a:off x="640000" y="2800000"/>
+            <a:off x="640000" y="760000"/>
             <a:ext cx="10912000" cy="800000"/>
           </a:xfrm>
           <a:prstGeom prst="rect">
@@ -7675,17 +6326,713 @@
           <a:p>
             <a:pPr>
               <a:spcAft>
-                <a:spcPts val="2160"/>
+                <a:spcPts val="1710"/>
               </a:spcAft>
             </a:pPr>
             <a:r>
-              <a:rPr sz="4800" b="1">
-                <a:solidFill>
-                  <a:srgbClr val="FBF7EF"/>
+              <a:rPr sz="3800" b="1">
+                <a:solidFill>
+                  <a:srgbClr val="1F2A44"/>
                 </a:solidFill>
                 <a:latin typeface="Fredoka"/>
               </a:rPr>
-              <a:t>Casos resueltos</a:t>
+              <a:t>Los cinco sesgos de la unidad (sesiones 45-48)</a:t>
+            </a:r>
+          </a:p>
+        </p:txBody>
+      </p:sp>
+      <p:sp>
+        <p:nvSpPr>
+          <p:cNvPr id="4" name="TextBox 3"/>
+          <p:cNvSpPr txBox="1"/>
+          <p:nvPr/>
+        </p:nvSpPr>
+        <p:spPr>
+          <a:xfrm>
+            <a:off x="640000" y="1650000"/>
+            <a:ext cx="10912000" cy="4808000"/>
+          </a:xfrm>
+          <a:prstGeom prst="rect">
+            <a:avLst/>
+          </a:prstGeom>
+          <a:noFill/>
+        </p:spPr>
+        <p:txBody>
+          <a:bodyPr wrap="square">
+            <a:spAutoFit/>
+          </a:bodyPr>
+          <a:lstStyle/>
+          <a:p>
+            <a:pPr>
+              <a:spcAft>
+                <a:spcPts val="1260"/>
+              </a:spcAft>
+            </a:pPr>
+            <a:r>
+              <a:rPr sz="2800" b="1">
+                <a:solidFill>
+                  <a:srgbClr val="E8793A"/>
+                </a:solidFill>
+                <a:latin typeface="Nunito Sans"/>
+              </a:rPr>
+              <a:t>• </a:t>
+            </a:r>
+            <a:r>
+              <a:rPr sz="2800" b="1">
+                <a:solidFill>
+                  <a:srgbClr val="1F2A44"/>
+                </a:solidFill>
+                <a:latin typeface="Nunito Sans"/>
+              </a:rPr>
+              <a:t>Confirmación:</a:t>
+            </a:r>
+            <a:r>
+              <a:rPr sz="2800" b="0">
+                <a:solidFill>
+                  <a:srgbClr val="1F2A44"/>
+                </a:solidFill>
+                <a:latin typeface="Nunito Sans"/>
+              </a:rPr>
+              <a:t> buscar y recordar solo lo que me da la razón</a:t>
+            </a:r>
+          </a:p>
+          <a:p>
+            <a:pPr>
+              <a:spcAft>
+                <a:spcPts val="1260"/>
+              </a:spcAft>
+            </a:pPr>
+            <a:r>
+              <a:rPr sz="2800" b="1">
+                <a:solidFill>
+                  <a:srgbClr val="E8793A"/>
+                </a:solidFill>
+                <a:latin typeface="Nunito Sans"/>
+              </a:rPr>
+              <a:t>• </a:t>
+            </a:r>
+            <a:r>
+              <a:rPr sz="2800" b="1">
+                <a:solidFill>
+                  <a:srgbClr val="1F2A44"/>
+                </a:solidFill>
+                <a:latin typeface="Nunito Sans"/>
+              </a:rPr>
+              <a:t>Halo:</a:t>
+            </a:r>
+            <a:r>
+              <a:rPr sz="2800" b="0">
+                <a:solidFill>
+                  <a:srgbClr val="1F2A44"/>
+                </a:solidFill>
+                <a:latin typeface="Nunito Sans"/>
+              </a:rPr>
+              <a:t> juzgar a alguien entero por un solo rasgo</a:t>
+            </a:r>
+          </a:p>
+          <a:p>
+            <a:pPr>
+              <a:spcAft>
+                <a:spcPts val="1260"/>
+              </a:spcAft>
+            </a:pPr>
+            <a:r>
+              <a:rPr sz="2800" b="1">
+                <a:solidFill>
+                  <a:srgbClr val="E8793A"/>
+                </a:solidFill>
+                <a:latin typeface="Nunito Sans"/>
+              </a:rPr>
+              <a:t>• </a:t>
+            </a:r>
+            <a:r>
+              <a:rPr sz="2800" b="1">
+                <a:solidFill>
+                  <a:srgbClr val="1F2A44"/>
+                </a:solidFill>
+                <a:latin typeface="Nunito Sans"/>
+              </a:rPr>
+              <a:t>Anclaje:</a:t>
+            </a:r>
+            <a:r>
+              <a:rPr sz="2800" b="0">
+                <a:solidFill>
+                  <a:srgbClr val="1F2A44"/>
+                </a:solidFill>
+                <a:latin typeface="Nunito Sans"/>
+              </a:rPr>
+              <a:t> el primer número me sirve de referencia sin querer</a:t>
+            </a:r>
+          </a:p>
+          <a:p>
+            <a:pPr>
+              <a:spcAft>
+                <a:spcPts val="1260"/>
+              </a:spcAft>
+            </a:pPr>
+            <a:r>
+              <a:rPr sz="2800" b="1">
+                <a:solidFill>
+                  <a:srgbClr val="E8793A"/>
+                </a:solidFill>
+                <a:latin typeface="Nunito Sans"/>
+              </a:rPr>
+              <a:t>• </a:t>
+            </a:r>
+            <a:r>
+              <a:rPr sz="2800" b="1">
+                <a:solidFill>
+                  <a:srgbClr val="1F2A44"/>
+                </a:solidFill>
+                <a:latin typeface="Nunito Sans"/>
+              </a:rPr>
+              <a:t>Encuadre:</a:t>
+            </a:r>
+            <a:r>
+              <a:rPr sz="2800" b="0">
+                <a:solidFill>
+                  <a:srgbClr val="1F2A44"/>
+                </a:solidFill>
+                <a:latin typeface="Nunito Sans"/>
+              </a:rPr>
+              <a:t> la forma de decir un dato cambia mi decisión</a:t>
+            </a:r>
+          </a:p>
+          <a:p>
+            <a:pPr>
+              <a:spcAft>
+                <a:spcPts val="1260"/>
+              </a:spcAft>
+            </a:pPr>
+            <a:r>
+              <a:rPr sz="2800" b="1">
+                <a:solidFill>
+                  <a:srgbClr val="E8793A"/>
+                </a:solidFill>
+                <a:latin typeface="Nunito Sans"/>
+              </a:rPr>
+              <a:t>• </a:t>
+            </a:r>
+            <a:r>
+              <a:rPr sz="2800" b="1">
+                <a:solidFill>
+                  <a:srgbClr val="1F2A44"/>
+                </a:solidFill>
+                <a:latin typeface="Nunito Sans"/>
+              </a:rPr>
+              <a:t>Exceso de confianza:</a:t>
+            </a:r>
+            <a:r>
+              <a:rPr sz="2800" b="0">
+                <a:solidFill>
+                  <a:srgbClr val="1F2A44"/>
+                </a:solidFill>
+                <a:latin typeface="Nunito Sans"/>
+              </a:rPr>
+              <a:t> creer que sé más de lo que sé</a:t>
+            </a:r>
+          </a:p>
+        </p:txBody>
+      </p:sp>
+    </p:spTree>
+  </p:cSld>
+  <p:clrMapOvr>
+    <a:masterClrMapping/>
+  </p:clrMapOvr>
+</p:sld>
+</file>
+
+<file path=ppt/slides/slide8.xml><?xml version="1.0" encoding="utf-8"?>
+<p:sld xmlns:a="http://schemas.openxmlformats.org/drawingml/2006/main" xmlns:p="http://schemas.openxmlformats.org/presentationml/2006/main" xmlns:r="http://schemas.openxmlformats.org/officeDocument/2006/relationships">
+  <p:cSld>
+    <p:bg>
+      <p:bgPr>
+        <a:solidFill>
+          <a:srgbClr val="FBF7EF"/>
+        </a:solidFill>
+        <a:effectLst/>
+      </p:bgPr>
+    </p:bg>
+    <p:spTree>
+      <p:nvGrpSpPr>
+        <p:cNvPr id="1" name=""/>
+        <p:cNvGrpSpPr/>
+        <p:nvPr/>
+      </p:nvGrpSpPr>
+      <p:grpSpPr/>
+      <p:sp>
+        <p:nvSpPr>
+          <p:cNvPr id="2" name="TextBox 1"/>
+          <p:cNvSpPr txBox="1"/>
+          <p:nvPr/>
+        </p:nvSpPr>
+        <p:spPr>
+          <a:xfrm>
+            <a:off x="640000" y="380000"/>
+            <a:ext cx="10912000" cy="420000"/>
+          </a:xfrm>
+          <a:prstGeom prst="rect">
+            <a:avLst/>
+          </a:prstGeom>
+          <a:noFill/>
+        </p:spPr>
+        <p:txBody>
+          <a:bodyPr wrap="square">
+            <a:spAutoFit/>
+          </a:bodyPr>
+          <a:lstStyle/>
+          <a:p>
+            <a:pPr>
+              <a:spcAft>
+                <a:spcPts val="630"/>
+              </a:spcAft>
+            </a:pPr>
+            <a:r>
+              <a:rPr sz="1400" b="1">
+                <a:solidFill>
+                  <a:srgbClr val="E8793A"/>
+                </a:solidFill>
+                <a:latin typeface="Nunito Sans"/>
+              </a:rPr>
+              <a:t>BLOQUE 1 · REPASO DE LA UNIDAD 8</a:t>
+            </a:r>
+          </a:p>
+        </p:txBody>
+      </p:sp>
+      <p:sp>
+        <p:nvSpPr>
+          <p:cNvPr id="3" name="TextBox 2"/>
+          <p:cNvSpPr txBox="1"/>
+          <p:nvPr/>
+        </p:nvSpPr>
+        <p:spPr>
+          <a:xfrm>
+            <a:off x="640000" y="760000"/>
+            <a:ext cx="10912000" cy="800000"/>
+          </a:xfrm>
+          <a:prstGeom prst="rect">
+            <a:avLst/>
+          </a:prstGeom>
+          <a:noFill/>
+        </p:spPr>
+        <p:txBody>
+          <a:bodyPr wrap="square">
+            <a:spAutoFit/>
+          </a:bodyPr>
+          <a:lstStyle/>
+          <a:p>
+            <a:pPr>
+              <a:spcAft>
+                <a:spcPts val="1710"/>
+              </a:spcAft>
+            </a:pPr>
+            <a:r>
+              <a:rPr sz="3800" b="1">
+                <a:solidFill>
+                  <a:srgbClr val="1F2A44"/>
+                </a:solidFill>
+                <a:latin typeface="Fredoka"/>
+              </a:rPr>
+              <a:t>Una pregunta para frenar cada sesgo</a:t>
+            </a:r>
+          </a:p>
+        </p:txBody>
+      </p:sp>
+      <p:graphicFrame>
+        <p:nvGraphicFramePr>
+          <p:cNvPr id="4" name="Table 3"/>
+          <p:cNvGraphicFramePr>
+            <a:graphicFrameLocks noGrp="1"/>
+          </p:cNvGraphicFramePr>
+          <p:nvPr/>
+        </p:nvGraphicFramePr>
+        <p:xfrm>
+          <a:off x="640000" y="1700000"/>
+          <a:ext cx="10912000" cy="3000000"/>
+        </p:xfrm>
+        <a:graphic>
+          <a:graphicData uri="http://schemas.openxmlformats.org/drawingml/2006/table">
+            <a:tbl>
+              <a:tblPr firstRow="1" bandRow="1">
+                <a:tableStyleId>{5C22544A-7EE6-4342-B048-85BDC9FD1C3A}</a:tableStyleId>
+              </a:tblPr>
+              <a:tblGrid>
+                <a:gridCol w="5456000"/>
+                <a:gridCol w="5456000"/>
+              </a:tblGrid>
+              <a:tr h="600000">
+                <a:tc>
+                  <a:txBody>
+                    <a:bodyPr/>
+                    <a:lstStyle/>
+                    <a:p>
+                      <a:r>
+                        <a:rPr sz="2000" b="1">
+                          <a:solidFill>
+                            <a:srgbClr val="FBF7EF"/>
+                          </a:solidFill>
+                          <a:latin typeface="Fredoka"/>
+                        </a:rPr>
+                        <a:t>Sesgo</a:t>
+                      </a:r>
+                    </a:p>
+                  </a:txBody>
+                  <a:tcPr>
+                    <a:solidFill>
+                      <a:srgbClr val="1F2A44"/>
+                    </a:solidFill>
+                  </a:tcPr>
+                </a:tc>
+                <a:tc>
+                  <a:txBody>
+                    <a:bodyPr/>
+                    <a:lstStyle/>
+                    <a:p>
+                      <a:r>
+                        <a:rPr sz="2000" b="1">
+                          <a:solidFill>
+                            <a:srgbClr val="FBF7EF"/>
+                          </a:solidFill>
+                          <a:latin typeface="Fredoka"/>
+                        </a:rPr>
+                        <a:t>Pregunta</a:t>
+                      </a:r>
+                    </a:p>
+                  </a:txBody>
+                  <a:tcPr>
+                    <a:solidFill>
+                      <a:srgbClr val="1F2A44"/>
+                    </a:solidFill>
+                  </a:tcPr>
+                </a:tc>
+              </a:tr>
+              <a:tr h="600000">
+                <a:tc>
+                  <a:txBody>
+                    <a:bodyPr/>
+                    <a:lstStyle/>
+                    <a:p>
+                      <a:r>
+                        <a:rPr sz="2000" b="0">
+                          <a:solidFill>
+                            <a:srgbClr val="1F2A44"/>
+                          </a:solidFill>
+                          <a:latin typeface="Nunito Sans"/>
+                        </a:rPr>
+                        <a:t>Confirmación</a:t>
+                      </a:r>
+                    </a:p>
+                  </a:txBody>
+                  <a:tcPr>
+                    <a:solidFill>
+                      <a:srgbClr val="FFFFFF"/>
+                    </a:solidFill>
+                  </a:tcPr>
+                </a:tc>
+                <a:tc>
+                  <a:txBody>
+                    <a:bodyPr/>
+                    <a:lstStyle/>
+                    <a:p>
+                      <a:r>
+                        <a:rPr sz="2000" b="0">
+                          <a:solidFill>
+                            <a:srgbClr val="1F2A44"/>
+                          </a:solidFill>
+                          <a:latin typeface="Nunito Sans"/>
+                        </a:rPr>
+                        <a:t>¿Qué me haría cambiar de opinión?</a:t>
+                      </a:r>
+                    </a:p>
+                  </a:txBody>
+                  <a:tcPr>
+                    <a:solidFill>
+                      <a:srgbClr val="FFFFFF"/>
+                    </a:solidFill>
+                  </a:tcPr>
+                </a:tc>
+              </a:tr>
+              <a:tr h="600000">
+                <a:tc>
+                  <a:txBody>
+                    <a:bodyPr/>
+                    <a:lstStyle/>
+                    <a:p>
+                      <a:r>
+                        <a:rPr sz="2000" b="0">
+                          <a:solidFill>
+                            <a:srgbClr val="1F2A44"/>
+                          </a:solidFill>
+                          <a:latin typeface="Nunito Sans"/>
+                        </a:rPr>
+                        <a:t>Halo</a:t>
+                      </a:r>
+                    </a:p>
+                  </a:txBody>
+                  <a:tcPr>
+                    <a:solidFill>
+                      <a:srgbClr val="EAF0F7"/>
+                    </a:solidFill>
+                  </a:tcPr>
+                </a:tc>
+                <a:tc>
+                  <a:txBody>
+                    <a:bodyPr/>
+                    <a:lstStyle/>
+                    <a:p>
+                      <a:r>
+                        <a:rPr sz="2000" b="0">
+                          <a:solidFill>
+                            <a:srgbClr val="1F2A44"/>
+                          </a:solidFill>
+                          <a:latin typeface="Nunito Sans"/>
+                        </a:rPr>
+                        <a:t>¿Qué sé de verdad, aparte de este rasgo?</a:t>
+                      </a:r>
+                    </a:p>
+                  </a:txBody>
+                  <a:tcPr>
+                    <a:solidFill>
+                      <a:srgbClr val="EAF0F7"/>
+                    </a:solidFill>
+                  </a:tcPr>
+                </a:tc>
+              </a:tr>
+              <a:tr h="600000">
+                <a:tc>
+                  <a:txBody>
+                    <a:bodyPr/>
+                    <a:lstStyle/>
+                    <a:p>
+                      <a:r>
+                        <a:rPr sz="2000" b="0">
+                          <a:solidFill>
+                            <a:srgbClr val="1F2A44"/>
+                          </a:solidFill>
+                          <a:latin typeface="Nunito Sans"/>
+                        </a:rPr>
+                        <a:t>Anclaje y encuadre</a:t>
+                      </a:r>
+                    </a:p>
+                  </a:txBody>
+                  <a:tcPr>
+                    <a:solidFill>
+                      <a:srgbClr val="FFFFFF"/>
+                    </a:solidFill>
+                  </a:tcPr>
+                </a:tc>
+                <a:tc>
+                  <a:txBody>
+                    <a:bodyPr/>
+                    <a:lstStyle/>
+                    <a:p>
+                      <a:r>
+                        <a:rPr sz="2000" b="0">
+                          <a:solidFill>
+                            <a:srgbClr val="1F2A44"/>
+                          </a:solidFill>
+                          <a:latin typeface="Nunito Sans"/>
+                        </a:rPr>
+                        <a:t>¿Y sin el primer número? ¿Y dicho al revés?</a:t>
+                      </a:r>
+                    </a:p>
+                  </a:txBody>
+                  <a:tcPr>
+                    <a:solidFill>
+                      <a:srgbClr val="FFFFFF"/>
+                    </a:solidFill>
+                  </a:tcPr>
+                </a:tc>
+              </a:tr>
+              <a:tr h="600000">
+                <a:tc>
+                  <a:txBody>
+                    <a:bodyPr/>
+                    <a:lstStyle/>
+                    <a:p>
+                      <a:r>
+                        <a:rPr sz="2000" b="0">
+                          <a:solidFill>
+                            <a:srgbClr val="1F2A44"/>
+                          </a:solidFill>
+                          <a:latin typeface="Nunito Sans"/>
+                        </a:rPr>
+                        <a:t>Exceso de confianza</a:t>
+                      </a:r>
+                    </a:p>
+                  </a:txBody>
+                  <a:tcPr>
+                    <a:solidFill>
+                      <a:srgbClr val="EAF0F7"/>
+                    </a:solidFill>
+                  </a:tcPr>
+                </a:tc>
+                <a:tc>
+                  <a:txBody>
+                    <a:bodyPr/>
+                    <a:lstStyle/>
+                    <a:p>
+                      <a:r>
+                        <a:rPr sz="2000" b="0">
+                          <a:solidFill>
+                            <a:srgbClr val="1F2A44"/>
+                          </a:solidFill>
+                          <a:latin typeface="Nunito Sans"/>
+                        </a:rPr>
+                        <a:t>¿Puedo explicarlo sin mirar?</a:t>
+                      </a:r>
+                    </a:p>
+                  </a:txBody>
+                  <a:tcPr>
+                    <a:solidFill>
+                      <a:srgbClr val="EAF0F7"/>
+                    </a:solidFill>
+                  </a:tcPr>
+                </a:tc>
+              </a:tr>
+            </a:tbl>
+          </a:graphicData>
+        </a:graphic>
+      </p:graphicFrame>
+    </p:spTree>
+  </p:cSld>
+  <p:clrMapOvr>
+    <a:masterClrMapping/>
+  </p:clrMapOvr>
+</p:sld>
+</file>
+
+<file path=ppt/slides/slide9.xml><?xml version="1.0" encoding="utf-8"?>
+<p:sld xmlns:a="http://schemas.openxmlformats.org/drawingml/2006/main" xmlns:p="http://schemas.openxmlformats.org/presentationml/2006/main" xmlns:r="http://schemas.openxmlformats.org/officeDocument/2006/relationships">
+  <p:cSld>
+    <p:bg>
+      <p:bgPr>
+        <a:solidFill>
+          <a:srgbClr val="FBF7EF"/>
+        </a:solidFill>
+        <a:effectLst/>
+      </p:bgPr>
+    </p:bg>
+    <p:spTree>
+      <p:nvGrpSpPr>
+        <p:cNvPr id="1" name=""/>
+        <p:cNvGrpSpPr/>
+        <p:nvPr/>
+      </p:nvGrpSpPr>
+      <p:grpSpPr/>
+      <p:sp>
+        <p:nvSpPr>
+          <p:cNvPr id="2" name="TextBox 1"/>
+          <p:cNvSpPr txBox="1"/>
+          <p:nvPr/>
+        </p:nvSpPr>
+        <p:spPr>
+          <a:xfrm>
+            <a:off x="640000" y="380000"/>
+            <a:ext cx="10912000" cy="420000"/>
+          </a:xfrm>
+          <a:prstGeom prst="rect">
+            <a:avLst/>
+          </a:prstGeom>
+          <a:noFill/>
+        </p:spPr>
+        <p:txBody>
+          <a:bodyPr wrap="square">
+            <a:spAutoFit/>
+          </a:bodyPr>
+          <a:lstStyle/>
+          <a:p>
+            <a:pPr>
+              <a:spcAft>
+                <a:spcPts val="630"/>
+              </a:spcAft>
+            </a:pPr>
+            <a:r>
+              <a:rPr sz="1400" b="1">
+                <a:solidFill>
+                  <a:srgbClr val="E8793A"/>
+                </a:solidFill>
+                <a:latin typeface="Nunito Sans"/>
+              </a:rPr>
+              <a:t>BLOQUE 1 · REPASO DE LA UNIDAD 8</a:t>
+            </a:r>
+          </a:p>
+        </p:txBody>
+      </p:sp>
+      <p:sp>
+        <p:nvSpPr>
+          <p:cNvPr id="3" name="TextBox 2"/>
+          <p:cNvSpPr txBox="1"/>
+          <p:nvPr/>
+        </p:nvSpPr>
+        <p:spPr>
+          <a:xfrm>
+            <a:off x="640000" y="1500000"/>
+            <a:ext cx="10912000" cy="3000000"/>
+          </a:xfrm>
+          <a:prstGeom prst="rect">
+            <a:avLst/>
+          </a:prstGeom>
+          <a:noFill/>
+        </p:spPr>
+        <p:txBody>
+          <a:bodyPr wrap="square">
+            <a:spAutoFit/>
+          </a:bodyPr>
+          <a:lstStyle/>
+          <a:p>
+            <a:pPr>
+              <a:spcAft>
+                <a:spcPts val="1530"/>
+              </a:spcAft>
+            </a:pPr>
+            <a:r>
+              <a:rPr sz="3400" b="1">
+                <a:solidFill>
+                  <a:srgbClr val="1F2A44"/>
+                </a:solidFill>
+                <a:latin typeface="Nunito Sans"/>
+              </a:rPr>
+              <a:t>El primer principio es que no debes engañarte a ti mismo, y tú eres la persona más fácil de engañar.</a:t>
+            </a:r>
+          </a:p>
+        </p:txBody>
+      </p:sp>
+      <p:sp>
+        <p:nvSpPr>
+          <p:cNvPr id="4" name="TextBox 3"/>
+          <p:cNvSpPr txBox="1"/>
+          <p:nvPr/>
+        </p:nvSpPr>
+        <p:spPr>
+          <a:xfrm>
+            <a:off x="640000" y="4700000"/>
+            <a:ext cx="10912000" cy="600000"/>
+          </a:xfrm>
+          <a:prstGeom prst="rect">
+            <a:avLst/>
+          </a:prstGeom>
+          <a:noFill/>
+        </p:spPr>
+        <p:txBody>
+          <a:bodyPr wrap="square">
+            <a:spAutoFit/>
+          </a:bodyPr>
+          <a:lstStyle/>
+          <a:p>
+            <a:pPr>
+              <a:spcAft>
+                <a:spcPts val="990"/>
+              </a:spcAft>
+            </a:pPr>
+            <a:r>
+              <a:rPr sz="2200" b="0">
+                <a:solidFill>
+                  <a:srgbClr val="4A5568"/>
+                </a:solidFill>
+                <a:latin typeface="Nunito Sans"/>
+              </a:rPr>
+              <a:t>Richard Feynman, discurso en Caltech (1974)</a:t>
             </a:r>
           </a:p>
         </p:txBody>
